--- a/Reports/Poster/caes_poster_horizontal_36x48.pptx
+++ b/Reports/Poster/caes_poster_horizontal_36x48.pptx
@@ -302,7 +302,7 @@
           <a:p>
             <a:fld id="{47B54311-7587-4D34-8FEB-00F5F44EE468}" type="datetimeFigureOut">
               <a:rPr lang="en-US" smtClean="0"/>
-              <a:t>6/19/2018</a:t>
+              <a:t>4/9/2026</a:t>
             </a:fld>
             <a:endParaRPr lang="en-US"/>
           </a:p>
@@ -465,7 +465,7 @@
           <a:p>
             <a:fld id="{47B54311-7587-4D34-8FEB-00F5F44EE468}" type="datetimeFigureOut">
               <a:rPr lang="en-US" smtClean="0"/>
-              <a:t>6/19/2018</a:t>
+              <a:t>4/9/2026</a:t>
             </a:fld>
             <a:endParaRPr lang="en-US"/>
           </a:p>
@@ -638,7 +638,7 @@
           <a:p>
             <a:fld id="{47B54311-7587-4D34-8FEB-00F5F44EE468}" type="datetimeFigureOut">
               <a:rPr lang="en-US" smtClean="0"/>
-              <a:t>6/19/2018</a:t>
+              <a:t>4/9/2026</a:t>
             </a:fld>
             <a:endParaRPr lang="en-US"/>
           </a:p>
@@ -801,7 +801,7 @@
           <a:p>
             <a:fld id="{47B54311-7587-4D34-8FEB-00F5F44EE468}" type="datetimeFigureOut">
               <a:rPr lang="en-US" smtClean="0"/>
-              <a:t>6/19/2018</a:t>
+              <a:t>4/9/2026</a:t>
             </a:fld>
             <a:endParaRPr lang="en-US"/>
           </a:p>
@@ -1041,7 +1041,7 @@
           <a:p>
             <a:fld id="{47B54311-7587-4D34-8FEB-00F5F44EE468}" type="datetimeFigureOut">
               <a:rPr lang="en-US" smtClean="0"/>
-              <a:t>6/19/2018</a:t>
+              <a:t>4/9/2026</a:t>
             </a:fld>
             <a:endParaRPr lang="en-US"/>
           </a:p>
@@ -1321,7 +1321,7 @@
           <a:p>
             <a:fld id="{47B54311-7587-4D34-8FEB-00F5F44EE468}" type="datetimeFigureOut">
               <a:rPr lang="en-US" smtClean="0"/>
-              <a:t>6/19/2018</a:t>
+              <a:t>4/9/2026</a:t>
             </a:fld>
             <a:endParaRPr lang="en-US"/>
           </a:p>
@@ -1740,7 +1740,7 @@
           <a:p>
             <a:fld id="{47B54311-7587-4D34-8FEB-00F5F44EE468}" type="datetimeFigureOut">
               <a:rPr lang="en-US" smtClean="0"/>
-              <a:t>6/19/2018</a:t>
+              <a:t>4/9/2026</a:t>
             </a:fld>
             <a:endParaRPr lang="en-US"/>
           </a:p>
@@ -1852,7 +1852,7 @@
           <a:p>
             <a:fld id="{47B54311-7587-4D34-8FEB-00F5F44EE468}" type="datetimeFigureOut">
               <a:rPr lang="en-US" smtClean="0"/>
-              <a:t>6/19/2018</a:t>
+              <a:t>4/9/2026</a:t>
             </a:fld>
             <a:endParaRPr lang="en-US"/>
           </a:p>
@@ -1942,7 +1942,7 @@
           <a:p>
             <a:fld id="{47B54311-7587-4D34-8FEB-00F5F44EE468}" type="datetimeFigureOut">
               <a:rPr lang="en-US" smtClean="0"/>
-              <a:t>6/19/2018</a:t>
+              <a:t>4/9/2026</a:t>
             </a:fld>
             <a:endParaRPr lang="en-US"/>
           </a:p>
@@ -2212,7 +2212,7 @@
           <a:p>
             <a:fld id="{47B54311-7587-4D34-8FEB-00F5F44EE468}" type="datetimeFigureOut">
               <a:rPr lang="en-US" smtClean="0"/>
-              <a:t>6/19/2018</a:t>
+              <a:t>4/9/2026</a:t>
             </a:fld>
             <a:endParaRPr lang="en-US"/>
           </a:p>
@@ -2462,7 +2462,7 @@
           <a:p>
             <a:fld id="{47B54311-7587-4D34-8FEB-00F5F44EE468}" type="datetimeFigureOut">
               <a:rPr lang="en-US" smtClean="0"/>
-              <a:t>6/19/2018</a:t>
+              <a:t>4/9/2026</a:t>
             </a:fld>
             <a:endParaRPr lang="en-US"/>
           </a:p>
@@ -2677,7 +2677,7 @@
           <a:p>
             <a:fld id="{47B54311-7587-4D34-8FEB-00F5F44EE468}" type="datetimeFigureOut">
               <a:rPr lang="en-US" smtClean="0"/>
-              <a:t>6/19/2018</a:t>
+              <a:t>4/9/2026</a:t>
             </a:fld>
             <a:endParaRPr lang="en-US"/>
           </a:p>
@@ -3033,6 +3033,14 @@
 <file path=ppt/slides/slide1.xml><?xml version="1.0" encoding="utf-8"?>
 <p:sld xmlns:a="http://schemas.openxmlformats.org/drawingml/2006/main" xmlns:r="http://schemas.openxmlformats.org/officeDocument/2006/relationships" xmlns:p="http://schemas.openxmlformats.org/presentationml/2006/main">
   <p:cSld>
+    <p:bg>
+      <p:bgPr>
+        <a:solidFill>
+          <a:srgbClr val="FFFFFF"/>
+        </a:solidFill>
+        <a:effectLst/>
+      </p:bgPr>
+    </p:bg>
     <p:spTree>
       <p:nvGrpSpPr>
         <p:cNvPr id="1" name=""/>
@@ -3047,99 +3055,58 @@
           <a:chExt cx="0" cy="0"/>
         </a:xfrm>
       </p:grpSpPr>
-      <p:sp>
-        <p:nvSpPr>
-          <p:cNvPr id="4" name="Text Box 699"/>
-          <p:cNvSpPr txBox="1">
-            <a:spLocks noChangeArrowheads="1"/>
-          </p:cNvSpPr>
+      <p:pic>
+        <p:nvPicPr>
+          <p:cNvPr id="3" name="Picture 2">
+            <a:extLst>
+              <a:ext uri="{FF2B5EF4-FFF2-40B4-BE49-F238E27FC236}">
+                <a16:creationId xmlns:a16="http://schemas.microsoft.com/office/drawing/2014/main" id="{E58142B9-D3A4-C35D-88C2-8112A58B257D}"/>
+              </a:ext>
+            </a:extLst>
+          </p:cNvPr>
+          <p:cNvPicPr>
+            <a:picLocks/>
+          </p:cNvPicPr>
           <p:nvPr/>
-        </p:nvSpPr>
-        <p:spPr bwMode="auto">
+        </p:nvPicPr>
+        <p:blipFill>
+          <a:blip r:embed="rId2" cstate="print">
+            <a:extLst>
+              <a:ext uri="{28A0092B-C50C-407E-A947-70E740481C1C}">
+                <a14:useLocalDpi xmlns:a14="http://schemas.microsoft.com/office/drawing/2010/main" val="0"/>
+              </a:ext>
+            </a:extLst>
+          </a:blip>
+          <a:stretch>
+            <a:fillRect/>
+          </a:stretch>
+        </p:blipFill>
+        <p:spPr>
           <a:xfrm>
-            <a:off x="5029200" y="914400"/>
-            <a:ext cx="34823400" cy="3903663"/>
+            <a:off x="431800" y="304800"/>
+            <a:ext cx="2286000" cy="2870200"/>
           </a:xfrm>
           <a:prstGeom prst="rect">
             <a:avLst/>
           </a:prstGeom>
-          <a:noFill/>
-          <a:ln w="9525">
-            <a:noFill/>
-            <a:miter lim="800000"/>
-            <a:headEnd/>
-            <a:tailEnd/>
-          </a:ln>
-          <a:effectLst/>
         </p:spPr>
-        <p:txBody>
-          <a:bodyPr wrap="square">
-            <a:spAutoFit/>
-          </a:bodyPr>
-          <a:lstStyle/>
-          <a:p>
-            <a:pPr algn="ctr">
-              <a:spcBef>
-                <a:spcPct val="50000"/>
-              </a:spcBef>
-            </a:pPr>
-            <a:r>
-              <a:rPr lang="en-US" sz="8000" b="1" dirty="0">
-                <a:solidFill>
-                  <a:srgbClr val="333399"/>
-                </a:solidFill>
-                <a:latin typeface="Arial"/>
-              </a:rPr>
-              <a:t>Title</a:t>
-            </a:r>
-          </a:p>
-          <a:p>
-            <a:pPr algn="ctr">
-              <a:spcBef>
-                <a:spcPct val="50000"/>
-              </a:spcBef>
-            </a:pPr>
-            <a:r>
-              <a:rPr lang="en-US" sz="6000" dirty="0">
-                <a:solidFill>
-                  <a:srgbClr val="333399"/>
-                </a:solidFill>
-                <a:latin typeface="Arial"/>
-              </a:rPr>
-              <a:t>Names</a:t>
-            </a:r>
-          </a:p>
-          <a:p>
-            <a:pPr algn="ctr">
-              <a:spcBef>
-                <a:spcPct val="50000"/>
-              </a:spcBef>
-            </a:pPr>
-            <a:r>
-              <a:rPr lang="en-US" sz="4800" dirty="0">
-                <a:solidFill>
-                  <a:srgbClr val="333399"/>
-                </a:solidFill>
-                <a:latin typeface="Arial"/>
-              </a:rPr>
-              <a:t>North Carolina A&amp;T State University</a:t>
-            </a:r>
-            <a:endParaRPr lang="en-US" sz="4800" dirty="0">
-              <a:latin typeface="Arial"/>
-            </a:endParaRPr>
-          </a:p>
-        </p:txBody>
-      </p:sp>
-      <p:sp>
-        <p:nvSpPr>
-          <p:cNvPr id="6" name="TextBox 5"/>
+      </p:pic>
+      <p:sp>
+        <p:nvSpPr>
+          <p:cNvPr id="5" name="TextBox 4">
+            <a:extLst>
+              <a:ext uri="{FF2B5EF4-FFF2-40B4-BE49-F238E27FC236}">
+                <a16:creationId xmlns:a16="http://schemas.microsoft.com/office/drawing/2014/main" id="{08A77BC3-4142-5C3F-F6FB-2A71F94A3D3F}"/>
+              </a:ext>
+            </a:extLst>
+          </p:cNvPr>
           <p:cNvSpPr txBox="1"/>
           <p:nvPr/>
         </p:nvSpPr>
         <p:spPr>
           <a:xfrm>
-            <a:off x="3004549" y="3778918"/>
-            <a:ext cx="184666" cy="1415772"/>
+            <a:off x="3429000" y="228600"/>
+            <a:ext cx="38608000" cy="584775"/>
           </a:xfrm>
           <a:prstGeom prst="rect">
             <a:avLst/>
@@ -3147,12 +3114,4790 @@
           <a:noFill/>
         </p:spPr>
         <p:txBody>
-          <a:bodyPr wrap="none" rtlCol="0">
+          <a:bodyPr vert="horz" wrap="square" lIns="25400" tIns="0" rIns="25400" bIns="0" rtlCol="0">
             <a:spAutoFit/>
           </a:bodyPr>
           <a:lstStyle/>
           <a:p>
-            <a:endParaRPr lang="en-US" dirty="0"/>
+            <a:pPr algn="ctr"/>
+            <a:r>
+              <a:rPr lang="en-US" sz="3800" b="1">
+                <a:solidFill>
+                  <a:srgbClr val="40464F"/>
+                </a:solidFill>
+                <a:latin typeface="Arial" panose="020B0604020202020204" pitchFamily="34" charset="0"/>
+              </a:rPr>
+              <a:t>Preliminary Design Tool for Flying Wing Unmanned Aerial Systems</a:t>
+            </a:r>
+          </a:p>
+        </p:txBody>
+      </p:sp>
+      <p:sp>
+        <p:nvSpPr>
+          <p:cNvPr id="7" name="TextBox 6">
+            <a:extLst>
+              <a:ext uri="{FF2B5EF4-FFF2-40B4-BE49-F238E27FC236}">
+                <a16:creationId xmlns:a16="http://schemas.microsoft.com/office/drawing/2014/main" id="{7D519C1D-89E0-46FC-BB57-4CD50B72AA1F}"/>
+              </a:ext>
+            </a:extLst>
+          </p:cNvPr>
+          <p:cNvSpPr txBox="1"/>
+          <p:nvPr/>
+        </p:nvSpPr>
+        <p:spPr>
+          <a:xfrm>
+            <a:off x="3429000" y="1092200"/>
+            <a:ext cx="38608000" cy="369332"/>
+          </a:xfrm>
+          <a:prstGeom prst="rect">
+            <a:avLst/>
+          </a:prstGeom>
+          <a:noFill/>
+        </p:spPr>
+        <p:txBody>
+          <a:bodyPr vert="horz" wrap="square" lIns="25400" tIns="0" rIns="25400" bIns="0" rtlCol="0">
+            <a:spAutoFit/>
+          </a:bodyPr>
+          <a:lstStyle/>
+          <a:p>
+            <a:pPr algn="ctr"/>
+            <a:r>
+              <a:rPr lang="en-US" sz="2400" b="1">
+                <a:solidFill>
+                  <a:srgbClr val="40464F"/>
+                </a:solidFill>
+                <a:latin typeface="Arial" panose="020B0604020202020204" pitchFamily="34" charset="0"/>
+              </a:rPr>
+              <a:t>Malik Henry</a:t>
+            </a:r>
+          </a:p>
+        </p:txBody>
+      </p:sp>
+      <p:sp>
+        <p:nvSpPr>
+          <p:cNvPr id="8" name="TextBox 7">
+            <a:extLst>
+              <a:ext uri="{FF2B5EF4-FFF2-40B4-BE49-F238E27FC236}">
+                <a16:creationId xmlns:a16="http://schemas.microsoft.com/office/drawing/2014/main" id="{233217D4-8F75-5367-1DE0-F7E50F80D2C6}"/>
+              </a:ext>
+            </a:extLst>
+          </p:cNvPr>
+          <p:cNvSpPr txBox="1"/>
+          <p:nvPr/>
+        </p:nvSpPr>
+        <p:spPr>
+          <a:xfrm>
+            <a:off x="3429000" y="1524000"/>
+            <a:ext cx="38608000" cy="246221"/>
+          </a:xfrm>
+          <a:prstGeom prst="rect">
+            <a:avLst/>
+          </a:prstGeom>
+          <a:noFill/>
+        </p:spPr>
+        <p:txBody>
+          <a:bodyPr vert="horz" wrap="square" lIns="25400" tIns="0" rIns="25400" bIns="0" rtlCol="0">
+            <a:spAutoFit/>
+          </a:bodyPr>
+          <a:lstStyle/>
+          <a:p>
+            <a:pPr algn="ctr"/>
+            <a:r>
+              <a:rPr lang="en-US" sz="1600">
+                <a:solidFill>
+                  <a:srgbClr val="40464F"/>
+                </a:solidFill>
+                <a:latin typeface="Arial" panose="020B0604020202020204" pitchFamily="34" charset="0"/>
+              </a:rPr>
+              <a:t>North Carolina Agricultural and Technical State University</a:t>
+            </a:r>
+          </a:p>
+        </p:txBody>
+      </p:sp>
+      <p:sp>
+        <p:nvSpPr>
+          <p:cNvPr id="9" name="TextBox 8">
+            <a:extLst>
+              <a:ext uri="{FF2B5EF4-FFF2-40B4-BE49-F238E27FC236}">
+                <a16:creationId xmlns:a16="http://schemas.microsoft.com/office/drawing/2014/main" id="{A4A5E276-650F-3F14-DA09-882BD17DB17E}"/>
+              </a:ext>
+            </a:extLst>
+          </p:cNvPr>
+          <p:cNvSpPr txBox="1"/>
+          <p:nvPr/>
+        </p:nvSpPr>
+        <p:spPr>
+          <a:xfrm>
+            <a:off x="3429000" y="1854200"/>
+            <a:ext cx="38608000" cy="223138"/>
+          </a:xfrm>
+          <a:prstGeom prst="rect">
+            <a:avLst/>
+          </a:prstGeom>
+          <a:noFill/>
+        </p:spPr>
+        <p:txBody>
+          <a:bodyPr vert="horz" wrap="square" lIns="25400" tIns="0" rIns="25400" bIns="0" rtlCol="0">
+            <a:spAutoFit/>
+          </a:bodyPr>
+          <a:lstStyle/>
+          <a:p>
+            <a:pPr algn="ctr"/>
+            <a:r>
+              <a:rPr lang="en-US" sz="1450">
+                <a:solidFill>
+                  <a:srgbClr val="40464F"/>
+                </a:solidFill>
+                <a:latin typeface="Arial" panose="020B0604020202020204" pitchFamily="34" charset="0"/>
+              </a:rPr>
+              <a:t>Department of Mechanical Engineering</a:t>
+            </a:r>
+          </a:p>
+        </p:txBody>
+      </p:sp>
+      <p:sp>
+        <p:nvSpPr>
+          <p:cNvPr id="10" name="TextBox 9">
+            <a:extLst>
+              <a:ext uri="{FF2B5EF4-FFF2-40B4-BE49-F238E27FC236}">
+                <a16:creationId xmlns:a16="http://schemas.microsoft.com/office/drawing/2014/main" id="{CFABCF7E-531D-A601-A482-F1759EB0F0F1}"/>
+              </a:ext>
+            </a:extLst>
+          </p:cNvPr>
+          <p:cNvSpPr txBox="1"/>
+          <p:nvPr/>
+        </p:nvSpPr>
+        <p:spPr>
+          <a:xfrm>
+            <a:off x="3429000" y="2235200"/>
+            <a:ext cx="38608000" cy="223138"/>
+          </a:xfrm>
+          <a:prstGeom prst="rect">
+            <a:avLst/>
+          </a:prstGeom>
+          <a:noFill/>
+        </p:spPr>
+        <p:txBody>
+          <a:bodyPr vert="horz" wrap="square" lIns="25400" tIns="0" rIns="25400" bIns="0" rtlCol="0">
+            <a:spAutoFit/>
+          </a:bodyPr>
+          <a:lstStyle/>
+          <a:p>
+            <a:pPr algn="ctr"/>
+            <a:r>
+              <a:rPr lang="en-US" sz="1450">
+                <a:solidFill>
+                  <a:srgbClr val="40464F"/>
+                </a:solidFill>
+                <a:latin typeface="Arial" panose="020B0604020202020204" pitchFamily="34" charset="0"/>
+              </a:rPr>
+              <a:t>Thesis contribution: an integrated preliminary-design workflow that keeps geometry, aerodynamics, structure, mission, and export tied to one aircraft definition.</a:t>
+            </a:r>
+          </a:p>
+        </p:txBody>
+      </p:sp>
+      <p:sp>
+        <p:nvSpPr>
+          <p:cNvPr id="11" name="Rectangle 10">
+            <a:extLst>
+              <a:ext uri="{FF2B5EF4-FFF2-40B4-BE49-F238E27FC236}">
+                <a16:creationId xmlns:a16="http://schemas.microsoft.com/office/drawing/2014/main" id="{8189F63F-2905-1C5E-2080-159A960D0E12}"/>
+              </a:ext>
+            </a:extLst>
+          </p:cNvPr>
+          <p:cNvSpPr/>
+          <p:nvPr/>
+        </p:nvSpPr>
+        <p:spPr>
+          <a:xfrm>
+            <a:off x="533400" y="3429000"/>
+            <a:ext cx="14414500" cy="762000"/>
+          </a:xfrm>
+          <a:prstGeom prst="rect">
+            <a:avLst/>
+          </a:prstGeom>
+          <a:solidFill>
+            <a:srgbClr val="044684"/>
+          </a:solidFill>
+          <a:ln w="25400" cap="flat" cmpd="sng" algn="ctr">
+            <a:noFill/>
+            <a:prstDash val="solid"/>
+          </a:ln>
+          <a:effectLst/>
+          <a:extLst>
+            <a:ext uri="{91240B29-F687-4F45-9708-019B960494DF}">
+              <a14:hiddenLine xmlns:a14="http://schemas.microsoft.com/office/drawing/2010/main" w="25400" cap="flat" cmpd="sng" algn="ctr">
+                <a:solidFill>
+                  <a:schemeClr val="accent1">
+                    <a:shade val="15000"/>
+                  </a:schemeClr>
+                </a:solidFill>
+                <a:prstDash val="solid"/>
+              </a14:hiddenLine>
+            </a:ext>
+          </a:extLst>
+        </p:spPr>
+        <p:style>
+          <a:lnRef idx="2">
+            <a:schemeClr val="accent1">
+              <a:shade val="15000"/>
+            </a:schemeClr>
+          </a:lnRef>
+          <a:fillRef idx="1">
+            <a:schemeClr val="accent1"/>
+          </a:fillRef>
+          <a:effectRef idx="0">
+            <a:schemeClr val="accent1"/>
+          </a:effectRef>
+          <a:fontRef idx="minor">
+            <a:schemeClr val="lt1"/>
+          </a:fontRef>
+        </p:style>
+        <p:txBody>
+          <a:bodyPr lIns="127000" tIns="88900" rIns="50800" bIns="25400" rtlCol="0" anchor="ctr"/>
+          <a:lstStyle/>
+          <a:p>
+            <a:r>
+              <a:rPr lang="en-US" sz="2900" b="1">
+                <a:solidFill>
+                  <a:srgbClr val="FFFFFF"/>
+                </a:solidFill>
+                <a:latin typeface="Arial" panose="020B0604020202020204" pitchFamily="34" charset="0"/>
+              </a:rPr>
+              <a:t>Abstract</a:t>
+            </a:r>
+          </a:p>
+        </p:txBody>
+      </p:sp>
+      <p:sp>
+        <p:nvSpPr>
+          <p:cNvPr id="12" name="TextBox 11">
+            <a:extLst>
+              <a:ext uri="{FF2B5EF4-FFF2-40B4-BE49-F238E27FC236}">
+                <a16:creationId xmlns:a16="http://schemas.microsoft.com/office/drawing/2014/main" id="{A980FBD4-D294-5DC4-1B0F-3D0DE0D45FBF}"/>
+              </a:ext>
+            </a:extLst>
+          </p:cNvPr>
+          <p:cNvSpPr txBox="1"/>
+          <p:nvPr/>
+        </p:nvSpPr>
+        <p:spPr>
+          <a:xfrm>
+            <a:off x="533400" y="4267200"/>
+            <a:ext cx="14414500" cy="2031325"/>
+          </a:xfrm>
+          <a:prstGeom prst="rect">
+            <a:avLst/>
+          </a:prstGeom>
+          <a:noFill/>
+        </p:spPr>
+        <p:txBody>
+          <a:bodyPr vert="horz" wrap="square" lIns="25400" tIns="0" rIns="25400" bIns="0" rtlCol="0">
+            <a:spAutoFit/>
+          </a:bodyPr>
+          <a:lstStyle/>
+          <a:p>
+            <a:r>
+              <a:rPr lang="en-US" sz="2200">
+                <a:solidFill>
+                  <a:srgbClr val="40464F"/>
+                </a:solidFill>
+                <a:latin typeface="Arial" panose="020B0604020202020204" pitchFamily="34" charset="0"/>
+              </a:rPr>
+              <a:t>The Flying Wing Tool is a preliminary-design environment for tailless aircraft built around one shared project model. The research problem addressed here is workflow fragmentation: geometry, aerodynamics, structure, mission, and export are often separated across different tools, which slows iteration and allows assumptions to drift. The implemented environment keeps those tasks tied to one aircraft definition. A representative blended-wing case study plus an independent BARAM CFD path were used to show both the value and the present limits of that workflow.</a:t>
+            </a:r>
+          </a:p>
+        </p:txBody>
+      </p:sp>
+      <p:sp>
+        <p:nvSpPr>
+          <p:cNvPr id="13" name="Rectangle 12">
+            <a:extLst>
+              <a:ext uri="{FF2B5EF4-FFF2-40B4-BE49-F238E27FC236}">
+                <a16:creationId xmlns:a16="http://schemas.microsoft.com/office/drawing/2014/main" id="{E8D9F140-10DD-199E-143E-D69C52402B44}"/>
+              </a:ext>
+            </a:extLst>
+          </p:cNvPr>
+          <p:cNvSpPr/>
+          <p:nvPr/>
+        </p:nvSpPr>
+        <p:spPr>
+          <a:xfrm>
+            <a:off x="533400" y="6248400"/>
+            <a:ext cx="14414500" cy="762000"/>
+          </a:xfrm>
+          <a:prstGeom prst="rect">
+            <a:avLst/>
+          </a:prstGeom>
+          <a:solidFill>
+            <a:srgbClr val="044684"/>
+          </a:solidFill>
+          <a:ln w="25400" cap="flat" cmpd="sng" algn="ctr">
+            <a:noFill/>
+            <a:prstDash val="solid"/>
+          </a:ln>
+          <a:effectLst/>
+          <a:extLst>
+            <a:ext uri="{91240B29-F687-4F45-9708-019B960494DF}">
+              <a14:hiddenLine xmlns:a14="http://schemas.microsoft.com/office/drawing/2010/main" w="25400" cap="flat" cmpd="sng" algn="ctr">
+                <a:solidFill>
+                  <a:schemeClr val="accent1">
+                    <a:shade val="15000"/>
+                  </a:schemeClr>
+                </a:solidFill>
+                <a:prstDash val="solid"/>
+              </a14:hiddenLine>
+            </a:ext>
+          </a:extLst>
+        </p:spPr>
+        <p:style>
+          <a:lnRef idx="2">
+            <a:schemeClr val="accent1">
+              <a:shade val="15000"/>
+            </a:schemeClr>
+          </a:lnRef>
+          <a:fillRef idx="1">
+            <a:schemeClr val="accent1"/>
+          </a:fillRef>
+          <a:effectRef idx="0">
+            <a:schemeClr val="accent1"/>
+          </a:effectRef>
+          <a:fontRef idx="minor">
+            <a:schemeClr val="lt1"/>
+          </a:fontRef>
+        </p:style>
+        <p:txBody>
+          <a:bodyPr lIns="127000" tIns="88900" rIns="50800" bIns="25400" rtlCol="0" anchor="ctr"/>
+          <a:lstStyle/>
+          <a:p>
+            <a:r>
+              <a:rPr lang="en-US" sz="2900" b="1">
+                <a:solidFill>
+                  <a:srgbClr val="FFFFFF"/>
+                </a:solidFill>
+                <a:latin typeface="Arial" panose="020B0604020202020204" pitchFamily="34" charset="0"/>
+              </a:rPr>
+              <a:t>Research Gap and Contribution</a:t>
+            </a:r>
+          </a:p>
+        </p:txBody>
+      </p:sp>
+      <p:sp>
+        <p:nvSpPr>
+          <p:cNvPr id="14" name="TextBox 13">
+            <a:extLst>
+              <a:ext uri="{FF2B5EF4-FFF2-40B4-BE49-F238E27FC236}">
+                <a16:creationId xmlns:a16="http://schemas.microsoft.com/office/drawing/2014/main" id="{D350FFC0-F52A-6D39-FCF3-BDC30FF07DC0}"/>
+              </a:ext>
+            </a:extLst>
+          </p:cNvPr>
+          <p:cNvSpPr txBox="1"/>
+          <p:nvPr/>
+        </p:nvSpPr>
+        <p:spPr>
+          <a:xfrm>
+            <a:off x="533400" y="7086600"/>
+            <a:ext cx="14414500" cy="1169551"/>
+          </a:xfrm>
+          <a:prstGeom prst="rect">
+            <a:avLst/>
+          </a:prstGeom>
+          <a:noFill/>
+        </p:spPr>
+        <p:txBody>
+          <a:bodyPr vert="horz" wrap="square" lIns="25400" tIns="0" rIns="25400" bIns="0" rtlCol="0">
+            <a:spAutoFit/>
+          </a:bodyPr>
+          <a:lstStyle/>
+          <a:p>
+            <a:pPr marL="457200" indent="-457200">
+              <a:buFont typeface="+mj-lt"/>
+              <a:buChar char="•"/>
+            </a:pPr>
+            <a:r>
+              <a:rPr lang="en-US" sz="1900">
+                <a:solidFill>
+                  <a:srgbClr val="40464F"/>
+                </a:solidFill>
+                <a:latin typeface="Arial" panose="020B0604020202020204" pitchFamily="34" charset="0"/>
+              </a:rPr>
+              <a:t>Flying-wing design is tightly coupled: planform and twist changes affect trim, loading, structure, and manufacturability together.</a:t>
+            </a:r>
+          </a:p>
+          <a:p>
+            <a:pPr marL="457200" indent="-457200">
+              <a:buFont typeface="+mj-lt"/>
+              <a:buChar char="•"/>
+            </a:pPr>
+            <a:r>
+              <a:rPr lang="en-US" sz="1900">
+                <a:solidFill>
+                  <a:srgbClr val="40464F"/>
+                </a:solidFill>
+                <a:latin typeface="Arial" panose="020B0604020202020204" pitchFamily="34" charset="0"/>
+              </a:rPr>
+              <a:t>Fragmented tool chains slow iteration because geometry and assumptions are repeatedly re-entered.</a:t>
+            </a:r>
+          </a:p>
+          <a:p>
+            <a:pPr marL="457200" indent="-457200">
+              <a:buFont typeface="+mj-lt"/>
+              <a:buChar char="•"/>
+            </a:pPr>
+            <a:r>
+              <a:rPr lang="en-US" sz="1900">
+                <a:solidFill>
+                  <a:srgbClr val="40464F"/>
+                </a:solidFill>
+                <a:latin typeface="Arial" panose="020B0604020202020204" pitchFamily="34" charset="0"/>
+              </a:rPr>
+              <a:t>The main contribution is software integration: one serialized project state supports geometry, aerodynamics, mission, structure, and export.</a:t>
+            </a:r>
+          </a:p>
+        </p:txBody>
+      </p:sp>
+      <p:sp>
+        <p:nvSpPr>
+          <p:cNvPr id="15" name="Rectangle 14">
+            <a:extLst>
+              <a:ext uri="{FF2B5EF4-FFF2-40B4-BE49-F238E27FC236}">
+                <a16:creationId xmlns:a16="http://schemas.microsoft.com/office/drawing/2014/main" id="{4AEE66C1-EB6B-074F-8ACF-4B0511573604}"/>
+              </a:ext>
+            </a:extLst>
+          </p:cNvPr>
+          <p:cNvSpPr/>
+          <p:nvPr/>
+        </p:nvSpPr>
+        <p:spPr>
+          <a:xfrm>
+            <a:off x="533400" y="8686800"/>
+            <a:ext cx="14414500" cy="762000"/>
+          </a:xfrm>
+          <a:prstGeom prst="rect">
+            <a:avLst/>
+          </a:prstGeom>
+          <a:solidFill>
+            <a:srgbClr val="044684"/>
+          </a:solidFill>
+          <a:ln w="25400" cap="flat" cmpd="sng" algn="ctr">
+            <a:noFill/>
+            <a:prstDash val="solid"/>
+          </a:ln>
+          <a:effectLst/>
+          <a:extLst>
+            <a:ext uri="{91240B29-F687-4F45-9708-019B960494DF}">
+              <a14:hiddenLine xmlns:a14="http://schemas.microsoft.com/office/drawing/2010/main" w="25400" cap="flat" cmpd="sng" algn="ctr">
+                <a:solidFill>
+                  <a:schemeClr val="accent1">
+                    <a:shade val="15000"/>
+                  </a:schemeClr>
+                </a:solidFill>
+                <a:prstDash val="solid"/>
+              </a14:hiddenLine>
+            </a:ext>
+          </a:extLst>
+        </p:spPr>
+        <p:style>
+          <a:lnRef idx="2">
+            <a:schemeClr val="accent1">
+              <a:shade val="15000"/>
+            </a:schemeClr>
+          </a:lnRef>
+          <a:fillRef idx="1">
+            <a:schemeClr val="accent1"/>
+          </a:fillRef>
+          <a:effectRef idx="0">
+            <a:schemeClr val="accent1"/>
+          </a:effectRef>
+          <a:fontRef idx="minor">
+            <a:schemeClr val="lt1"/>
+          </a:fontRef>
+        </p:style>
+        <p:txBody>
+          <a:bodyPr lIns="127000" tIns="88900" rIns="50800" bIns="25400" rtlCol="0" anchor="ctr"/>
+          <a:lstStyle/>
+          <a:p>
+            <a:r>
+              <a:rPr lang="en-US" sz="2900" b="1">
+                <a:solidFill>
+                  <a:srgbClr val="FFFFFF"/>
+                </a:solidFill>
+                <a:latin typeface="Arial" panose="020B0604020202020204" pitchFamily="34" charset="0"/>
+              </a:rPr>
+              <a:t>Implemented Workflow</a:t>
+            </a:r>
+          </a:p>
+        </p:txBody>
+      </p:sp>
+      <p:sp>
+        <p:nvSpPr>
+          <p:cNvPr id="16" name="TextBox 15">
+            <a:extLst>
+              <a:ext uri="{FF2B5EF4-FFF2-40B4-BE49-F238E27FC236}">
+                <a16:creationId xmlns:a16="http://schemas.microsoft.com/office/drawing/2014/main" id="{CB896950-B15B-3616-63F9-A9FB7AED52DC}"/>
+              </a:ext>
+            </a:extLst>
+          </p:cNvPr>
+          <p:cNvSpPr txBox="1"/>
+          <p:nvPr/>
+        </p:nvSpPr>
+        <p:spPr>
+          <a:xfrm>
+            <a:off x="533400" y="9525000"/>
+            <a:ext cx="14414500" cy="1138773"/>
+          </a:xfrm>
+          <a:prstGeom prst="rect">
+            <a:avLst/>
+          </a:prstGeom>
+          <a:noFill/>
+        </p:spPr>
+        <p:txBody>
+          <a:bodyPr vert="horz" wrap="square" lIns="25400" tIns="0" rIns="25400" bIns="0" rtlCol="0">
+            <a:spAutoFit/>
+          </a:bodyPr>
+          <a:lstStyle/>
+          <a:p>
+            <a:pPr marL="457200" indent="-457200">
+              <a:buFont typeface="+mj-lt"/>
+              <a:buChar char="•"/>
+            </a:pPr>
+            <a:r>
+              <a:rPr lang="en-US" sz="1850">
+                <a:solidFill>
+                  <a:srgbClr val="40464F"/>
+                </a:solidFill>
+                <a:latin typeface="Arial" panose="020B0604020202020204" pitchFamily="34" charset="0"/>
+              </a:rPr>
+              <a:t>GUI tabs: Geometry, Analysis, Mission, Structure, and Export.</a:t>
+            </a:r>
+          </a:p>
+          <a:p>
+            <a:pPr marL="457200" indent="-457200">
+              <a:buFont typeface="+mj-lt"/>
+              <a:buChar char="•"/>
+            </a:pPr>
+            <a:r>
+              <a:rPr lang="en-US" sz="1850">
+                <a:solidFill>
+                  <a:srgbClr val="40464F"/>
+                </a:solidFill>
+                <a:latin typeface="Arial" panose="020B0604020202020204" pitchFamily="34" charset="0"/>
+              </a:rPr>
+              <a:t>Shared state: one project object stores wing definition, trim assumptions, mission settings, and outputs.</a:t>
+            </a:r>
+          </a:p>
+          <a:p>
+            <a:pPr marL="457200" indent="-457200">
+              <a:buFont typeface="+mj-lt"/>
+              <a:buChar char="•"/>
+            </a:pPr>
+            <a:r>
+              <a:rPr lang="en-US" sz="1850">
+                <a:solidFill>
+                  <a:srgbClr val="40464F"/>
+                </a:solidFill>
+                <a:latin typeface="Arial" panose="020B0604020202020204" pitchFamily="34" charset="0"/>
+              </a:rPr>
+              <a:t>Service layer: geometry or aerodynamics, mission or propulsion, wingbox-oriented structure, and export.</a:t>
+            </a:r>
+          </a:p>
+          <a:p>
+            <a:pPr marL="457200" indent="-457200">
+              <a:buFont typeface="+mj-lt"/>
+              <a:buChar char="•"/>
+            </a:pPr>
+            <a:r>
+              <a:rPr lang="en-US" sz="1850">
+                <a:solidFill>
+                  <a:srgbClr val="40464F"/>
+                </a:solidFill>
+                <a:latin typeface="Arial" panose="020B0604020202020204" pitchFamily="34" charset="0"/>
+              </a:rPr>
+              <a:t>Reproducibility path: run_full_analysis.py reloads saved projects for repeatable reruns.</a:t>
+            </a:r>
+          </a:p>
+        </p:txBody>
+      </p:sp>
+      <p:sp>
+        <p:nvSpPr>
+          <p:cNvPr id="17" name="TextBox 16">
+            <a:extLst>
+              <a:ext uri="{FF2B5EF4-FFF2-40B4-BE49-F238E27FC236}">
+                <a16:creationId xmlns:a16="http://schemas.microsoft.com/office/drawing/2014/main" id="{5E3724BB-CE9C-0FC1-9CEF-001A421AA5BD}"/>
+              </a:ext>
+            </a:extLst>
+          </p:cNvPr>
+          <p:cNvSpPr txBox="1"/>
+          <p:nvPr/>
+        </p:nvSpPr>
+        <p:spPr>
+          <a:xfrm>
+            <a:off x="533400" y="11455400"/>
+            <a:ext cx="14414500" cy="323165"/>
+          </a:xfrm>
+          <a:prstGeom prst="rect">
+            <a:avLst/>
+          </a:prstGeom>
+          <a:noFill/>
+        </p:spPr>
+        <p:txBody>
+          <a:bodyPr vert="horz" wrap="square" lIns="25400" tIns="0" rIns="25400" bIns="0" rtlCol="0">
+            <a:spAutoFit/>
+          </a:bodyPr>
+          <a:lstStyle/>
+          <a:p>
+            <a:r>
+              <a:rPr lang="en-US" sz="2100" b="1">
+                <a:solidFill>
+                  <a:srgbClr val="044684"/>
+                </a:solidFill>
+                <a:latin typeface="Arial" panose="020B0604020202020204" pitchFamily="34" charset="0"/>
+              </a:rPr>
+              <a:t>Capability snapshot</a:t>
+            </a:r>
+          </a:p>
+        </p:txBody>
+      </p:sp>
+      <p:graphicFrame>
+        <p:nvGraphicFramePr>
+          <p:cNvPr id="18" name="Table 17">
+            <a:extLst>
+              <a:ext uri="{FF2B5EF4-FFF2-40B4-BE49-F238E27FC236}">
+                <a16:creationId xmlns:a16="http://schemas.microsoft.com/office/drawing/2014/main" id="{F6988764-C1AD-FB70-B03C-F5B9ED00AF99}"/>
+              </a:ext>
+            </a:extLst>
+          </p:cNvPr>
+          <p:cNvGraphicFramePr>
+            <a:graphicFrameLocks noGrp="1"/>
+          </p:cNvGraphicFramePr>
+          <p:nvPr>
+            <p:extLst>
+              <p:ext uri="{D42A27DB-BD31-4B8C-83A1-F6EECF244321}">
+                <p14:modId xmlns:p14="http://schemas.microsoft.com/office/powerpoint/2010/main" val="1706797940"/>
+              </p:ext>
+            </p:extLst>
+          </p:nvPr>
+        </p:nvGraphicFramePr>
+        <p:xfrm>
+          <a:off x="533400" y="11861800"/>
+          <a:ext cx="14414500" cy="3378200"/>
+        </p:xfrm>
+        <a:graphic>
+          <a:graphicData uri="http://schemas.openxmlformats.org/drawingml/2006/table">
+            <a:tbl>
+              <a:tblPr firstRow="1" bandRow="1">
+                <a:tableStyleId>{5C22544A-7EE6-4342-B048-85BDC9FD1C3A}</a:tableStyleId>
+              </a:tblPr>
+              <a:tblGrid>
+                <a:gridCol w="2286000">
+                  <a:extLst>
+                    <a:ext uri="{9D8B030D-6E8A-4147-A177-3AD203B41FA5}">
+                      <a16:colId xmlns:a16="http://schemas.microsoft.com/office/drawing/2014/main" val="828027022"/>
+                    </a:ext>
+                  </a:extLst>
+                </a:gridCol>
+                <a:gridCol w="1397000">
+                  <a:extLst>
+                    <a:ext uri="{9D8B030D-6E8A-4147-A177-3AD203B41FA5}">
+                      <a16:colId xmlns:a16="http://schemas.microsoft.com/office/drawing/2014/main" val="629532416"/>
+                    </a:ext>
+                  </a:extLst>
+                </a:gridCol>
+                <a:gridCol w="10731500">
+                  <a:extLst>
+                    <a:ext uri="{9D8B030D-6E8A-4147-A177-3AD203B41FA5}">
+                      <a16:colId xmlns:a16="http://schemas.microsoft.com/office/drawing/2014/main" val="78824970"/>
+                    </a:ext>
+                  </a:extLst>
+                </a:gridCol>
+              </a:tblGrid>
+              <a:tr h="482600">
+                <a:tc>
+                  <a:txBody>
+                    <a:bodyPr/>
+                    <a:lstStyle/>
+                    <a:p>
+                      <a:pPr algn="l">
+                        <a:spcBef>
+                          <a:spcPts val="0"/>
+                        </a:spcBef>
+                        <a:spcAft>
+                          <a:spcPts val="0"/>
+                        </a:spcAft>
+                      </a:pPr>
+                      <a:r>
+                        <a:rPr lang="en-US" sz="1620" b="1" i="0">
+                          <a:solidFill>
+                            <a:srgbClr val="FFFFFF"/>
+                          </a:solidFill>
+                          <a:latin typeface="Arial" panose="020B0604020202020204" pitchFamily="34" charset="0"/>
+                        </a:rPr>
+                        <a:t>Module</a:t>
+                      </a:r>
+                    </a:p>
+                  </a:txBody>
+                  <a:tcPr marL="50800" marR="50800" marT="25400" marB="12700">
+                    <a:solidFill>
+                      <a:srgbClr val="044684"/>
+                    </a:solidFill>
+                  </a:tcPr>
+                </a:tc>
+                <a:tc>
+                  <a:txBody>
+                    <a:bodyPr/>
+                    <a:lstStyle/>
+                    <a:p>
+                      <a:pPr algn="l">
+                        <a:spcBef>
+                          <a:spcPts val="0"/>
+                        </a:spcBef>
+                        <a:spcAft>
+                          <a:spcPts val="0"/>
+                        </a:spcAft>
+                      </a:pPr>
+                      <a:r>
+                        <a:rPr lang="en-US" sz="1620" b="1" i="0">
+                          <a:solidFill>
+                            <a:srgbClr val="FFFFFF"/>
+                          </a:solidFill>
+                          <a:latin typeface="Arial" panose="020B0604020202020204" pitchFamily="34" charset="0"/>
+                        </a:rPr>
+                        <a:t>State</a:t>
+                      </a:r>
+                    </a:p>
+                  </a:txBody>
+                  <a:tcPr marL="50800" marR="50800" marT="25400" marB="12700">
+                    <a:solidFill>
+                      <a:srgbClr val="044684"/>
+                    </a:solidFill>
+                  </a:tcPr>
+                </a:tc>
+                <a:tc>
+                  <a:txBody>
+                    <a:bodyPr/>
+                    <a:lstStyle/>
+                    <a:p>
+                      <a:pPr algn="l">
+                        <a:spcBef>
+                          <a:spcPts val="0"/>
+                        </a:spcBef>
+                        <a:spcAft>
+                          <a:spcPts val="0"/>
+                        </a:spcAft>
+                      </a:pPr>
+                      <a:r>
+                        <a:rPr lang="en-US" sz="1620" b="1" i="0">
+                          <a:solidFill>
+                            <a:srgbClr val="FFFFFF"/>
+                          </a:solidFill>
+                          <a:latin typeface="Arial" panose="020B0604020202020204" pitchFamily="34" charset="0"/>
+                        </a:rPr>
+                        <a:t>Role in the current thesis scope</a:t>
+                      </a:r>
+                    </a:p>
+                  </a:txBody>
+                  <a:tcPr marL="50800" marR="50800" marT="25400" marB="12700">
+                    <a:solidFill>
+                      <a:srgbClr val="044684"/>
+                    </a:solidFill>
+                  </a:tcPr>
+                </a:tc>
+                <a:extLst>
+                  <a:ext uri="{0D108BD9-81ED-4DB2-BD59-A6C34878D82A}">
+                    <a16:rowId xmlns:a16="http://schemas.microsoft.com/office/drawing/2014/main" val="1799778663"/>
+                  </a:ext>
+                </a:extLst>
+              </a:tr>
+              <a:tr h="482600">
+                <a:tc>
+                  <a:txBody>
+                    <a:bodyPr/>
+                    <a:lstStyle/>
+                    <a:p>
+                      <a:pPr algn="l">
+                        <a:spcBef>
+                          <a:spcPts val="0"/>
+                        </a:spcBef>
+                        <a:spcAft>
+                          <a:spcPts val="0"/>
+                        </a:spcAft>
+                      </a:pPr>
+                      <a:r>
+                        <a:rPr lang="en-US" sz="1620" b="0" i="0">
+                          <a:solidFill>
+                            <a:srgbClr val="40464F"/>
+                          </a:solidFill>
+                          <a:latin typeface="Arial" panose="020B0604020202020204" pitchFamily="34" charset="0"/>
+                        </a:rPr>
+                        <a:t>Geometry</a:t>
+                      </a:r>
+                    </a:p>
+                  </a:txBody>
+                  <a:tcPr marL="50800" marR="50800" marT="25400" marB="12700"/>
+                </a:tc>
+                <a:tc>
+                  <a:txBody>
+                    <a:bodyPr/>
+                    <a:lstStyle/>
+                    <a:p>
+                      <a:pPr algn="l">
+                        <a:spcBef>
+                          <a:spcPts val="0"/>
+                        </a:spcBef>
+                        <a:spcAft>
+                          <a:spcPts val="0"/>
+                        </a:spcAft>
+                      </a:pPr>
+                      <a:r>
+                        <a:rPr lang="en-US" sz="1620" b="0" i="0">
+                          <a:solidFill>
+                            <a:srgbClr val="40464F"/>
+                          </a:solidFill>
+                          <a:latin typeface="Arial" panose="020B0604020202020204" pitchFamily="34" charset="0"/>
+                        </a:rPr>
+                        <a:t>Active</a:t>
+                      </a:r>
+                    </a:p>
+                  </a:txBody>
+                  <a:tcPr marL="50800" marR="50800" marT="25400" marB="12700"/>
+                </a:tc>
+                <a:tc>
+                  <a:txBody>
+                    <a:bodyPr/>
+                    <a:lstStyle/>
+                    <a:p>
+                      <a:pPr algn="l">
+                        <a:spcBef>
+                          <a:spcPts val="0"/>
+                        </a:spcBef>
+                        <a:spcAft>
+                          <a:spcPts val="0"/>
+                        </a:spcAft>
+                      </a:pPr>
+                      <a:r>
+                        <a:rPr lang="en-US" sz="1620" b="0" i="0">
+                          <a:solidFill>
+                            <a:srgbClr val="40464F"/>
+                          </a:solidFill>
+                          <a:latin typeface="Arial" panose="020B0604020202020204" pitchFamily="34" charset="0"/>
+                        </a:rPr>
+                        <a:t>Parametric planform, airfoil, control-surface, and section generation</a:t>
+                      </a:r>
+                    </a:p>
+                  </a:txBody>
+                  <a:tcPr marL="50800" marR="50800" marT="25400" marB="12700"/>
+                </a:tc>
+                <a:extLst>
+                  <a:ext uri="{0D108BD9-81ED-4DB2-BD59-A6C34878D82A}">
+                    <a16:rowId xmlns:a16="http://schemas.microsoft.com/office/drawing/2014/main" val="3577937223"/>
+                  </a:ext>
+                </a:extLst>
+              </a:tr>
+              <a:tr h="482600">
+                <a:tc>
+                  <a:txBody>
+                    <a:bodyPr/>
+                    <a:lstStyle/>
+                    <a:p>
+                      <a:pPr algn="l">
+                        <a:spcBef>
+                          <a:spcPts val="0"/>
+                        </a:spcBef>
+                        <a:spcAft>
+                          <a:spcPts val="0"/>
+                        </a:spcAft>
+                      </a:pPr>
+                      <a:r>
+                        <a:rPr lang="en-US" sz="1620" b="0" i="0">
+                          <a:solidFill>
+                            <a:srgbClr val="40464F"/>
+                          </a:solidFill>
+                          <a:latin typeface="Arial" panose="020B0604020202020204" pitchFamily="34" charset="0"/>
+                        </a:rPr>
+                        <a:t>Analysis</a:t>
+                      </a:r>
+                    </a:p>
+                  </a:txBody>
+                  <a:tcPr marL="50800" marR="50800" marT="25400" marB="12700"/>
+                </a:tc>
+                <a:tc>
+                  <a:txBody>
+                    <a:bodyPr/>
+                    <a:lstStyle/>
+                    <a:p>
+                      <a:pPr algn="l">
+                        <a:spcBef>
+                          <a:spcPts val="0"/>
+                        </a:spcBef>
+                        <a:spcAft>
+                          <a:spcPts val="0"/>
+                        </a:spcAft>
+                      </a:pPr>
+                      <a:r>
+                        <a:rPr lang="en-US" sz="1620" b="0" i="0">
+                          <a:solidFill>
+                            <a:srgbClr val="40464F"/>
+                          </a:solidFill>
+                          <a:latin typeface="Arial" panose="020B0604020202020204" pitchFamily="34" charset="0"/>
+                        </a:rPr>
+                        <a:t>Active</a:t>
+                      </a:r>
+                    </a:p>
+                  </a:txBody>
+                  <a:tcPr marL="50800" marR="50800" marT="25400" marB="12700"/>
+                </a:tc>
+                <a:tc>
+                  <a:txBody>
+                    <a:bodyPr/>
+                    <a:lstStyle/>
+                    <a:p>
+                      <a:pPr algn="l">
+                        <a:spcBef>
+                          <a:spcPts val="0"/>
+                        </a:spcBef>
+                        <a:spcAft>
+                          <a:spcPts val="0"/>
+                        </a:spcAft>
+                      </a:pPr>
+                      <a:r>
+                        <a:rPr lang="en-US" sz="1620" b="0" i="0">
+                          <a:solidFill>
+                            <a:srgbClr val="40464F"/>
+                          </a:solidFill>
+                          <a:latin typeface="Arial" panose="020B0604020202020204" pitchFamily="34" charset="0"/>
+                        </a:rPr>
+                        <a:t>Aero polars, twist synthesis, and performance metrics</a:t>
+                      </a:r>
+                    </a:p>
+                  </a:txBody>
+                  <a:tcPr marL="50800" marR="50800" marT="25400" marB="12700"/>
+                </a:tc>
+                <a:extLst>
+                  <a:ext uri="{0D108BD9-81ED-4DB2-BD59-A6C34878D82A}">
+                    <a16:rowId xmlns:a16="http://schemas.microsoft.com/office/drawing/2014/main" val="570812680"/>
+                  </a:ext>
+                </a:extLst>
+              </a:tr>
+              <a:tr h="482600">
+                <a:tc>
+                  <a:txBody>
+                    <a:bodyPr/>
+                    <a:lstStyle/>
+                    <a:p>
+                      <a:pPr algn="l">
+                        <a:spcBef>
+                          <a:spcPts val="0"/>
+                        </a:spcBef>
+                        <a:spcAft>
+                          <a:spcPts val="0"/>
+                        </a:spcAft>
+                      </a:pPr>
+                      <a:r>
+                        <a:rPr lang="en-US" sz="1620" b="0" i="0">
+                          <a:solidFill>
+                            <a:srgbClr val="40464F"/>
+                          </a:solidFill>
+                          <a:latin typeface="Arial" panose="020B0604020202020204" pitchFamily="34" charset="0"/>
+                        </a:rPr>
+                        <a:t>Mission</a:t>
+                      </a:r>
+                    </a:p>
+                  </a:txBody>
+                  <a:tcPr marL="50800" marR="50800" marT="25400" marB="12700"/>
+                </a:tc>
+                <a:tc>
+                  <a:txBody>
+                    <a:bodyPr/>
+                    <a:lstStyle/>
+                    <a:p>
+                      <a:pPr algn="l">
+                        <a:spcBef>
+                          <a:spcPts val="0"/>
+                        </a:spcBef>
+                        <a:spcAft>
+                          <a:spcPts val="0"/>
+                        </a:spcAft>
+                      </a:pPr>
+                      <a:r>
+                        <a:rPr lang="en-US" sz="1620" b="0" i="0">
+                          <a:solidFill>
+                            <a:srgbClr val="40464F"/>
+                          </a:solidFill>
+                          <a:latin typeface="Arial" panose="020B0604020202020204" pitchFamily="34" charset="0"/>
+                        </a:rPr>
+                        <a:t>Active</a:t>
+                      </a:r>
+                    </a:p>
+                  </a:txBody>
+                  <a:tcPr marL="50800" marR="50800" marT="25400" marB="12700"/>
+                </a:tc>
+                <a:tc>
+                  <a:txBody>
+                    <a:bodyPr/>
+                    <a:lstStyle/>
+                    <a:p>
+                      <a:pPr algn="l">
+                        <a:spcBef>
+                          <a:spcPts val="0"/>
+                        </a:spcBef>
+                        <a:spcAft>
+                          <a:spcPts val="0"/>
+                        </a:spcAft>
+                      </a:pPr>
+                      <a:r>
+                        <a:rPr lang="en-US" sz="1620" b="0" i="0">
+                          <a:solidFill>
+                            <a:srgbClr val="40464F"/>
+                          </a:solidFill>
+                          <a:latin typeface="Arial" panose="020B0604020202020204" pitchFamily="34" charset="0"/>
+                        </a:rPr>
+                        <a:t>Stored mission simulation and phase-level summaries</a:t>
+                      </a:r>
+                    </a:p>
+                  </a:txBody>
+                  <a:tcPr marL="50800" marR="50800" marT="25400" marB="12700"/>
+                </a:tc>
+                <a:extLst>
+                  <a:ext uri="{0D108BD9-81ED-4DB2-BD59-A6C34878D82A}">
+                    <a16:rowId xmlns:a16="http://schemas.microsoft.com/office/drawing/2014/main" val="553728422"/>
+                  </a:ext>
+                </a:extLst>
+              </a:tr>
+              <a:tr h="482600">
+                <a:tc>
+                  <a:txBody>
+                    <a:bodyPr/>
+                    <a:lstStyle/>
+                    <a:p>
+                      <a:pPr algn="l">
+                        <a:spcBef>
+                          <a:spcPts val="0"/>
+                        </a:spcBef>
+                        <a:spcAft>
+                          <a:spcPts val="0"/>
+                        </a:spcAft>
+                      </a:pPr>
+                      <a:r>
+                        <a:rPr lang="en-US" sz="1620" b="0" i="0">
+                          <a:solidFill>
+                            <a:srgbClr val="40464F"/>
+                          </a:solidFill>
+                          <a:latin typeface="Arial" panose="020B0604020202020204" pitchFamily="34" charset="0"/>
+                        </a:rPr>
+                        <a:t>Structure</a:t>
+                      </a:r>
+                    </a:p>
+                  </a:txBody>
+                  <a:tcPr marL="50800" marR="50800" marT="25400" marB="12700"/>
+                </a:tc>
+                <a:tc>
+                  <a:txBody>
+                    <a:bodyPr/>
+                    <a:lstStyle/>
+                    <a:p>
+                      <a:pPr algn="l">
+                        <a:spcBef>
+                          <a:spcPts val="0"/>
+                        </a:spcBef>
+                        <a:spcAft>
+                          <a:spcPts val="0"/>
+                        </a:spcAft>
+                      </a:pPr>
+                      <a:r>
+                        <a:rPr lang="en-US" sz="1620" b="0" i="0">
+                          <a:solidFill>
+                            <a:srgbClr val="40464F"/>
+                          </a:solidFill>
+                          <a:latin typeface="Arial" panose="020B0604020202020204" pitchFamily="34" charset="0"/>
+                        </a:rPr>
+                        <a:t>Active</a:t>
+                      </a:r>
+                    </a:p>
+                  </a:txBody>
+                  <a:tcPr marL="50800" marR="50800" marT="25400" marB="12700"/>
+                </a:tc>
+                <a:tc>
+                  <a:txBody>
+                    <a:bodyPr/>
+                    <a:lstStyle/>
+                    <a:p>
+                      <a:pPr algn="l">
+                        <a:spcBef>
+                          <a:spcPts val="0"/>
+                        </a:spcBef>
+                        <a:spcAft>
+                          <a:spcPts val="0"/>
+                        </a:spcAft>
+                      </a:pPr>
+                      <a:r>
+                        <a:rPr lang="en-US" sz="1620" b="0" i="0">
+                          <a:solidFill>
+                            <a:srgbClr val="40464F"/>
+                          </a:solidFill>
+                          <a:latin typeface="Arial" panose="020B0604020202020204" pitchFamily="34" charset="0"/>
+                        </a:rPr>
+                        <a:t>Wingbox sizing, margins, deflection, and feasibility checks</a:t>
+                      </a:r>
+                    </a:p>
+                  </a:txBody>
+                  <a:tcPr marL="50800" marR="50800" marT="25400" marB="12700"/>
+                </a:tc>
+                <a:extLst>
+                  <a:ext uri="{0D108BD9-81ED-4DB2-BD59-A6C34878D82A}">
+                    <a16:rowId xmlns:a16="http://schemas.microsoft.com/office/drawing/2014/main" val="2601503443"/>
+                  </a:ext>
+                </a:extLst>
+              </a:tr>
+              <a:tr h="482600">
+                <a:tc>
+                  <a:txBody>
+                    <a:bodyPr/>
+                    <a:lstStyle/>
+                    <a:p>
+                      <a:pPr algn="l">
+                        <a:spcBef>
+                          <a:spcPts val="0"/>
+                        </a:spcBef>
+                        <a:spcAft>
+                          <a:spcPts val="0"/>
+                        </a:spcAft>
+                      </a:pPr>
+                      <a:r>
+                        <a:rPr lang="en-US" sz="1620" b="0" i="0">
+                          <a:solidFill>
+                            <a:srgbClr val="40464F"/>
+                          </a:solidFill>
+                          <a:latin typeface="Arial" panose="020B0604020202020204" pitchFamily="34" charset="0"/>
+                        </a:rPr>
+                        <a:t>Export</a:t>
+                      </a:r>
+                    </a:p>
+                  </a:txBody>
+                  <a:tcPr marL="50800" marR="50800" marT="25400" marB="12700"/>
+                </a:tc>
+                <a:tc>
+                  <a:txBody>
+                    <a:bodyPr/>
+                    <a:lstStyle/>
+                    <a:p>
+                      <a:pPr algn="l">
+                        <a:spcBef>
+                          <a:spcPts val="0"/>
+                        </a:spcBef>
+                        <a:spcAft>
+                          <a:spcPts val="0"/>
+                        </a:spcAft>
+                      </a:pPr>
+                      <a:r>
+                        <a:rPr lang="en-US" sz="1620" b="0" i="0">
+                          <a:solidFill>
+                            <a:srgbClr val="40464F"/>
+                          </a:solidFill>
+                          <a:latin typeface="Arial" panose="020B0604020202020204" pitchFamily="34" charset="0"/>
+                        </a:rPr>
+                        <a:t>Active</a:t>
+                      </a:r>
+                    </a:p>
+                  </a:txBody>
+                  <a:tcPr marL="50800" marR="50800" marT="25400" marB="12700"/>
+                </a:tc>
+                <a:tc>
+                  <a:txBody>
+                    <a:bodyPr/>
+                    <a:lstStyle/>
+                    <a:p>
+                      <a:pPr algn="l">
+                        <a:spcBef>
+                          <a:spcPts val="0"/>
+                        </a:spcBef>
+                        <a:spcAft>
+                          <a:spcPts val="0"/>
+                        </a:spcAft>
+                      </a:pPr>
+                      <a:r>
+                        <a:rPr lang="en-US" sz="1620" b="0" i="0">
+                          <a:solidFill>
+                            <a:srgbClr val="40464F"/>
+                          </a:solidFill>
+                          <a:latin typeface="Arial" panose="020B0604020202020204" pitchFamily="34" charset="0"/>
+                        </a:rPr>
+                        <a:t>CAD and manufacturing-oriented geometry handoff</a:t>
+                      </a:r>
+                    </a:p>
+                  </a:txBody>
+                  <a:tcPr marL="50800" marR="50800" marT="25400" marB="12700"/>
+                </a:tc>
+                <a:extLst>
+                  <a:ext uri="{0D108BD9-81ED-4DB2-BD59-A6C34878D82A}">
+                    <a16:rowId xmlns:a16="http://schemas.microsoft.com/office/drawing/2014/main" val="2279730587"/>
+                  </a:ext>
+                </a:extLst>
+              </a:tr>
+              <a:tr h="482600">
+                <a:tc>
+                  <a:txBody>
+                    <a:bodyPr/>
+                    <a:lstStyle/>
+                    <a:p>
+                      <a:pPr algn="l">
+                        <a:spcBef>
+                          <a:spcPts val="0"/>
+                        </a:spcBef>
+                        <a:spcAft>
+                          <a:spcPts val="0"/>
+                        </a:spcAft>
+                      </a:pPr>
+                      <a:r>
+                        <a:rPr lang="en-US" sz="1620" b="0" i="0">
+                          <a:solidFill>
+                            <a:srgbClr val="40464F"/>
+                          </a:solidFill>
+                          <a:latin typeface="Arial" panose="020B0604020202020204" pitchFamily="34" charset="0"/>
+                        </a:rPr>
+                        <a:t>Batch rerun</a:t>
+                      </a:r>
+                    </a:p>
+                  </a:txBody>
+                  <a:tcPr marL="50800" marR="50800" marT="25400" marB="12700"/>
+                </a:tc>
+                <a:tc>
+                  <a:txBody>
+                    <a:bodyPr/>
+                    <a:lstStyle/>
+                    <a:p>
+                      <a:pPr algn="l">
+                        <a:spcBef>
+                          <a:spcPts val="0"/>
+                        </a:spcBef>
+                        <a:spcAft>
+                          <a:spcPts val="0"/>
+                        </a:spcAft>
+                      </a:pPr>
+                      <a:r>
+                        <a:rPr lang="en-US" sz="1620" b="0" i="0">
+                          <a:solidFill>
+                            <a:srgbClr val="40464F"/>
+                          </a:solidFill>
+                          <a:latin typeface="Arial" panose="020B0604020202020204" pitchFamily="34" charset="0"/>
+                        </a:rPr>
+                        <a:t>Active</a:t>
+                      </a:r>
+                    </a:p>
+                  </a:txBody>
+                  <a:tcPr marL="50800" marR="50800" marT="25400" marB="12700"/>
+                </a:tc>
+                <a:tc>
+                  <a:txBody>
+                    <a:bodyPr/>
+                    <a:lstStyle/>
+                    <a:p>
+                      <a:pPr algn="l">
+                        <a:spcBef>
+                          <a:spcPts val="0"/>
+                        </a:spcBef>
+                        <a:spcAft>
+                          <a:spcPts val="0"/>
+                        </a:spcAft>
+                      </a:pPr>
+                      <a:r>
+                        <a:rPr lang="en-US" sz="1620" b="0" i="0">
+                          <a:solidFill>
+                            <a:srgbClr val="40464F"/>
+                          </a:solidFill>
+                          <a:latin typeface="Arial" panose="020B0604020202020204" pitchFamily="34" charset="0"/>
+                        </a:rPr>
+                        <a:t>File-based reproducibility from saved projects</a:t>
+                      </a:r>
+                    </a:p>
+                  </a:txBody>
+                  <a:tcPr marL="50800" marR="50800" marT="25400" marB="12700"/>
+                </a:tc>
+                <a:extLst>
+                  <a:ext uri="{0D108BD9-81ED-4DB2-BD59-A6C34878D82A}">
+                    <a16:rowId xmlns:a16="http://schemas.microsoft.com/office/drawing/2014/main" val="307339366"/>
+                  </a:ext>
+                </a:extLst>
+              </a:tr>
+            </a:tbl>
+          </a:graphicData>
+        </a:graphic>
+      </p:graphicFrame>
+      <p:pic>
+        <p:nvPicPr>
+          <p:cNvPr id="20" name="Picture 19">
+            <a:extLst>
+              <a:ext uri="{FF2B5EF4-FFF2-40B4-BE49-F238E27FC236}">
+                <a16:creationId xmlns:a16="http://schemas.microsoft.com/office/drawing/2014/main" id="{F7AEFBEB-71A8-44FB-66C1-BADFBD8638F8}"/>
+              </a:ext>
+            </a:extLst>
+          </p:cNvPr>
+          <p:cNvPicPr>
+            <a:picLocks/>
+          </p:cNvPicPr>
+          <p:nvPr/>
+        </p:nvPicPr>
+        <p:blipFill>
+          <a:blip r:embed="rId3" cstate="print">
+            <a:extLst>
+              <a:ext uri="{28A0092B-C50C-407E-A947-70E740481C1C}">
+                <a14:useLocalDpi xmlns:a14="http://schemas.microsoft.com/office/drawing/2010/main" val="0"/>
+              </a:ext>
+            </a:extLst>
+          </a:blip>
+          <a:stretch>
+            <a:fillRect/>
+          </a:stretch>
+        </p:blipFill>
+        <p:spPr>
+          <a:xfrm>
+            <a:off x="533400" y="15468600"/>
+            <a:ext cx="6959600" cy="3280228"/>
+          </a:xfrm>
+          <a:prstGeom prst="rect">
+            <a:avLst/>
+          </a:prstGeom>
+        </p:spPr>
+      </p:pic>
+      <p:sp>
+        <p:nvSpPr>
+          <p:cNvPr id="21" name="TextBox 20">
+            <a:extLst>
+              <a:ext uri="{FF2B5EF4-FFF2-40B4-BE49-F238E27FC236}">
+                <a16:creationId xmlns:a16="http://schemas.microsoft.com/office/drawing/2014/main" id="{B550C4B4-2E2E-6E33-96AA-3205054DCB87}"/>
+              </a:ext>
+            </a:extLst>
+          </p:cNvPr>
+          <p:cNvSpPr txBox="1"/>
+          <p:nvPr/>
+        </p:nvSpPr>
+        <p:spPr>
+          <a:xfrm>
+            <a:off x="533400" y="18821400"/>
+            <a:ext cx="6959600" cy="215444"/>
+          </a:xfrm>
+          <a:prstGeom prst="rect">
+            <a:avLst/>
+          </a:prstGeom>
+          <a:noFill/>
+        </p:spPr>
+        <p:txBody>
+          <a:bodyPr vert="horz" wrap="square" lIns="0" tIns="0" rIns="0" bIns="0" rtlCol="0">
+            <a:spAutoFit/>
+          </a:bodyPr>
+          <a:lstStyle/>
+          <a:p>
+            <a:r>
+              <a:rPr lang="en-US" sz="1400">
+                <a:solidFill>
+                  <a:srgbClr val="40464F"/>
+                </a:solidFill>
+                <a:latin typeface="Arial" panose="020B0604020202020204" pitchFamily="34" charset="0"/>
+              </a:rPr>
+              <a:t>Geometry tab for planform, airfoil, and control-surface definition.</a:t>
+            </a:r>
+          </a:p>
+        </p:txBody>
+      </p:sp>
+      <p:pic>
+        <p:nvPicPr>
+          <p:cNvPr id="23" name="Picture 22">
+            <a:extLst>
+              <a:ext uri="{FF2B5EF4-FFF2-40B4-BE49-F238E27FC236}">
+                <a16:creationId xmlns:a16="http://schemas.microsoft.com/office/drawing/2014/main" id="{E25F3524-0964-3E51-E2F1-2A4ECCECD0C9}"/>
+              </a:ext>
+            </a:extLst>
+          </p:cNvPr>
+          <p:cNvPicPr>
+            <a:picLocks/>
+          </p:cNvPicPr>
+          <p:nvPr/>
+        </p:nvPicPr>
+        <p:blipFill>
+          <a:blip r:embed="rId4" cstate="print">
+            <a:extLst>
+              <a:ext uri="{28A0092B-C50C-407E-A947-70E740481C1C}">
+                <a14:useLocalDpi xmlns:a14="http://schemas.microsoft.com/office/drawing/2010/main" val="0"/>
+              </a:ext>
+            </a:extLst>
+          </a:blip>
+          <a:stretch>
+            <a:fillRect/>
+          </a:stretch>
+        </p:blipFill>
+        <p:spPr>
+          <a:xfrm>
+            <a:off x="7988300" y="15468600"/>
+            <a:ext cx="6959600" cy="3181635"/>
+          </a:xfrm>
+          <a:prstGeom prst="rect">
+            <a:avLst/>
+          </a:prstGeom>
+        </p:spPr>
+      </p:pic>
+      <p:sp>
+        <p:nvSpPr>
+          <p:cNvPr id="24" name="TextBox 23">
+            <a:extLst>
+              <a:ext uri="{FF2B5EF4-FFF2-40B4-BE49-F238E27FC236}">
+                <a16:creationId xmlns:a16="http://schemas.microsoft.com/office/drawing/2014/main" id="{30088358-C4F2-2761-14E8-AED12EE6CFB4}"/>
+              </a:ext>
+            </a:extLst>
+          </p:cNvPr>
+          <p:cNvSpPr txBox="1"/>
+          <p:nvPr/>
+        </p:nvSpPr>
+        <p:spPr>
+          <a:xfrm>
+            <a:off x="7988300" y="18821400"/>
+            <a:ext cx="6959600" cy="215444"/>
+          </a:xfrm>
+          <a:prstGeom prst="rect">
+            <a:avLst/>
+          </a:prstGeom>
+          <a:noFill/>
+        </p:spPr>
+        <p:txBody>
+          <a:bodyPr vert="horz" wrap="square" lIns="0" tIns="0" rIns="0" bIns="0" rtlCol="0">
+            <a:spAutoFit/>
+          </a:bodyPr>
+          <a:lstStyle/>
+          <a:p>
+            <a:r>
+              <a:rPr lang="en-US" sz="1400">
+                <a:solidFill>
+                  <a:srgbClr val="40464F"/>
+                </a:solidFill>
+                <a:latin typeface="Arial" panose="020B0604020202020204" pitchFamily="34" charset="0"/>
+              </a:rPr>
+              <a:t>Analysis tab for aerodynamic sweeps and post-processing.</a:t>
+            </a:r>
+          </a:p>
+        </p:txBody>
+      </p:sp>
+      <p:sp>
+        <p:nvSpPr>
+          <p:cNvPr id="25" name="Rectangle 24">
+            <a:extLst>
+              <a:ext uri="{FF2B5EF4-FFF2-40B4-BE49-F238E27FC236}">
+                <a16:creationId xmlns:a16="http://schemas.microsoft.com/office/drawing/2014/main" id="{A024A170-852E-E962-5E42-CC202FD7DED1}"/>
+              </a:ext>
+            </a:extLst>
+          </p:cNvPr>
+          <p:cNvSpPr/>
+          <p:nvPr/>
+        </p:nvSpPr>
+        <p:spPr>
+          <a:xfrm>
+            <a:off x="533400" y="19558000"/>
+            <a:ext cx="14414500" cy="762000"/>
+          </a:xfrm>
+          <a:prstGeom prst="rect">
+            <a:avLst/>
+          </a:prstGeom>
+          <a:solidFill>
+            <a:srgbClr val="044684"/>
+          </a:solidFill>
+          <a:ln w="25400" cap="flat" cmpd="sng" algn="ctr">
+            <a:noFill/>
+            <a:prstDash val="solid"/>
+          </a:ln>
+          <a:effectLst/>
+          <a:extLst>
+            <a:ext uri="{91240B29-F687-4F45-9708-019B960494DF}">
+              <a14:hiddenLine xmlns:a14="http://schemas.microsoft.com/office/drawing/2010/main" w="25400" cap="flat" cmpd="sng" algn="ctr">
+                <a:solidFill>
+                  <a:schemeClr val="accent1">
+                    <a:shade val="15000"/>
+                  </a:schemeClr>
+                </a:solidFill>
+                <a:prstDash val="solid"/>
+              </a14:hiddenLine>
+            </a:ext>
+          </a:extLst>
+        </p:spPr>
+        <p:style>
+          <a:lnRef idx="2">
+            <a:schemeClr val="accent1">
+              <a:shade val="15000"/>
+            </a:schemeClr>
+          </a:lnRef>
+          <a:fillRef idx="1">
+            <a:schemeClr val="accent1"/>
+          </a:fillRef>
+          <a:effectRef idx="0">
+            <a:schemeClr val="accent1"/>
+          </a:effectRef>
+          <a:fontRef idx="minor">
+            <a:schemeClr val="lt1"/>
+          </a:fontRef>
+        </p:style>
+        <p:txBody>
+          <a:bodyPr lIns="127000" tIns="88900" rIns="50800" bIns="25400" rtlCol="0" anchor="ctr"/>
+          <a:lstStyle/>
+          <a:p>
+            <a:r>
+              <a:rPr lang="en-US" sz="2900" b="1">
+                <a:solidFill>
+                  <a:srgbClr val="FFFFFF"/>
+                </a:solidFill>
+                <a:latin typeface="Arial" panose="020B0604020202020204" pitchFamily="34" charset="0"/>
+              </a:rPr>
+              <a:t>Why the Integrated Loop Matters</a:t>
+            </a:r>
+          </a:p>
+        </p:txBody>
+      </p:sp>
+      <p:sp>
+        <p:nvSpPr>
+          <p:cNvPr id="26" name="TextBox 25">
+            <a:extLst>
+              <a:ext uri="{FF2B5EF4-FFF2-40B4-BE49-F238E27FC236}">
+                <a16:creationId xmlns:a16="http://schemas.microsoft.com/office/drawing/2014/main" id="{5271DC2E-1A3D-E1EF-8C7A-89EF6F1CD964}"/>
+              </a:ext>
+            </a:extLst>
+          </p:cNvPr>
+          <p:cNvSpPr txBox="1"/>
+          <p:nvPr/>
+        </p:nvSpPr>
+        <p:spPr>
+          <a:xfrm>
+            <a:off x="533400" y="20396200"/>
+            <a:ext cx="14414500" cy="877163"/>
+          </a:xfrm>
+          <a:prstGeom prst="rect">
+            <a:avLst/>
+          </a:prstGeom>
+          <a:noFill/>
+        </p:spPr>
+        <p:txBody>
+          <a:bodyPr vert="horz" wrap="square" lIns="25400" tIns="0" rIns="25400" bIns="0" rtlCol="0">
+            <a:spAutoFit/>
+          </a:bodyPr>
+          <a:lstStyle/>
+          <a:p>
+            <a:pPr marL="457200" indent="-457200">
+              <a:buFont typeface="+mj-lt"/>
+              <a:buChar char="•"/>
+            </a:pPr>
+            <a:r>
+              <a:rPr lang="en-US" sz="1900">
+                <a:solidFill>
+                  <a:srgbClr val="40464F"/>
+                </a:solidFill>
+                <a:latin typeface="Arial" panose="020B0604020202020204" pitchFamily="34" charset="0"/>
+              </a:rPr>
+              <a:t>The same spanwise sections drive aerodynamic loading, structural sizing, and exported geometry.</a:t>
+            </a:r>
+          </a:p>
+          <a:p>
+            <a:pPr marL="457200" indent="-457200">
+              <a:buFont typeface="+mj-lt"/>
+              <a:buChar char="•"/>
+            </a:pPr>
+            <a:r>
+              <a:rPr lang="en-US" sz="1900">
+                <a:solidFill>
+                  <a:srgbClr val="40464F"/>
+                </a:solidFill>
+                <a:latin typeface="Arial" panose="020B0604020202020204" pitchFamily="34" charset="0"/>
+              </a:rPr>
+              <a:t>Twist optimization is written back into the same project state used for later structural and mission analysis.</a:t>
+            </a:r>
+          </a:p>
+          <a:p>
+            <a:pPr marL="457200" indent="-457200">
+              <a:buFont typeface="+mj-lt"/>
+              <a:buChar char="•"/>
+            </a:pPr>
+            <a:r>
+              <a:rPr lang="en-US" sz="1900">
+                <a:solidFill>
+                  <a:srgbClr val="40464F"/>
+                </a:solidFill>
+                <a:latin typeface="Arial" panose="020B0604020202020204" pitchFamily="34" charset="0"/>
+              </a:rPr>
+              <a:t>One saved case can expose aerodynamic promise together with a governing structural or drag limitation.</a:t>
+            </a:r>
+          </a:p>
+        </p:txBody>
+      </p:sp>
+      <p:sp>
+        <p:nvSpPr>
+          <p:cNvPr id="27" name="Rectangle 26">
+            <a:extLst>
+              <a:ext uri="{FF2B5EF4-FFF2-40B4-BE49-F238E27FC236}">
+                <a16:creationId xmlns:a16="http://schemas.microsoft.com/office/drawing/2014/main" id="{E2C18F77-EA4B-64D8-0C29-67C9A4536092}"/>
+              </a:ext>
+            </a:extLst>
+          </p:cNvPr>
+          <p:cNvSpPr/>
+          <p:nvPr/>
+        </p:nvSpPr>
+        <p:spPr>
+          <a:xfrm>
+            <a:off x="15494000" y="3429000"/>
+            <a:ext cx="14414500" cy="762000"/>
+          </a:xfrm>
+          <a:prstGeom prst="rect">
+            <a:avLst/>
+          </a:prstGeom>
+          <a:solidFill>
+            <a:srgbClr val="044684"/>
+          </a:solidFill>
+          <a:ln w="25400" cap="flat" cmpd="sng" algn="ctr">
+            <a:noFill/>
+            <a:prstDash val="solid"/>
+          </a:ln>
+          <a:effectLst/>
+          <a:extLst>
+            <a:ext uri="{91240B29-F687-4F45-9708-019B960494DF}">
+              <a14:hiddenLine xmlns:a14="http://schemas.microsoft.com/office/drawing/2010/main" w="25400" cap="flat" cmpd="sng" algn="ctr">
+                <a:solidFill>
+                  <a:schemeClr val="accent1">
+                    <a:shade val="15000"/>
+                  </a:schemeClr>
+                </a:solidFill>
+                <a:prstDash val="solid"/>
+              </a14:hiddenLine>
+            </a:ext>
+          </a:extLst>
+        </p:spPr>
+        <p:style>
+          <a:lnRef idx="2">
+            <a:schemeClr val="accent1">
+              <a:shade val="15000"/>
+            </a:schemeClr>
+          </a:lnRef>
+          <a:fillRef idx="1">
+            <a:schemeClr val="accent1"/>
+          </a:fillRef>
+          <a:effectRef idx="0">
+            <a:schemeClr val="accent1"/>
+          </a:effectRef>
+          <a:fontRef idx="minor">
+            <a:schemeClr val="lt1"/>
+          </a:fontRef>
+        </p:style>
+        <p:txBody>
+          <a:bodyPr lIns="127000" tIns="88900" rIns="50800" bIns="25400" rtlCol="0" anchor="ctr"/>
+          <a:lstStyle/>
+          <a:p>
+            <a:r>
+              <a:rPr lang="en-US" sz="2900" b="1">
+                <a:solidFill>
+                  <a:srgbClr val="FFFFFF"/>
+                </a:solidFill>
+                <a:latin typeface="Arial" panose="020B0604020202020204" pitchFamily="34" charset="0"/>
+              </a:rPr>
+              <a:t>Representative Case: IntendedValidation2</a:t>
+            </a:r>
+          </a:p>
+        </p:txBody>
+      </p:sp>
+      <p:graphicFrame>
+        <p:nvGraphicFramePr>
+          <p:cNvPr id="28" name="Table 27">
+            <a:extLst>
+              <a:ext uri="{FF2B5EF4-FFF2-40B4-BE49-F238E27FC236}">
+                <a16:creationId xmlns:a16="http://schemas.microsoft.com/office/drawing/2014/main" id="{03C8F4D1-F4FE-A199-7A33-E7C479FEECDE}"/>
+              </a:ext>
+            </a:extLst>
+          </p:cNvPr>
+          <p:cNvGraphicFramePr>
+            <a:graphicFrameLocks noGrp="1"/>
+          </p:cNvGraphicFramePr>
+          <p:nvPr>
+            <p:extLst>
+              <p:ext uri="{D42A27DB-BD31-4B8C-83A1-F6EECF244321}">
+                <p14:modId xmlns:p14="http://schemas.microsoft.com/office/powerpoint/2010/main" val="2017130968"/>
+              </p:ext>
+            </p:extLst>
+          </p:nvPr>
+        </p:nvGraphicFramePr>
+        <p:xfrm>
+          <a:off x="15494000" y="4267200"/>
+          <a:ext cx="14414500" cy="2463800"/>
+        </p:xfrm>
+        <a:graphic>
+          <a:graphicData uri="http://schemas.openxmlformats.org/drawingml/2006/table">
+            <a:tbl>
+              <a:tblPr firstRow="1" bandRow="1">
+                <a:tableStyleId>{5C22544A-7EE6-4342-B048-85BDC9FD1C3A}</a:tableStyleId>
+              </a:tblPr>
+              <a:tblGrid>
+                <a:gridCol w="2095500">
+                  <a:extLst>
+                    <a:ext uri="{9D8B030D-6E8A-4147-A177-3AD203B41FA5}">
+                      <a16:colId xmlns:a16="http://schemas.microsoft.com/office/drawing/2014/main" val="3431416453"/>
+                    </a:ext>
+                  </a:extLst>
+                </a:gridCol>
+                <a:gridCol w="2857500">
+                  <a:extLst>
+                    <a:ext uri="{9D8B030D-6E8A-4147-A177-3AD203B41FA5}">
+                      <a16:colId xmlns:a16="http://schemas.microsoft.com/office/drawing/2014/main" val="480190970"/>
+                    </a:ext>
+                  </a:extLst>
+                </a:gridCol>
+                <a:gridCol w="2349500">
+                  <a:extLst>
+                    <a:ext uri="{9D8B030D-6E8A-4147-A177-3AD203B41FA5}">
+                      <a16:colId xmlns:a16="http://schemas.microsoft.com/office/drawing/2014/main" val="1499372329"/>
+                    </a:ext>
+                  </a:extLst>
+                </a:gridCol>
+                <a:gridCol w="7112000">
+                  <a:extLst>
+                    <a:ext uri="{9D8B030D-6E8A-4147-A177-3AD203B41FA5}">
+                      <a16:colId xmlns:a16="http://schemas.microsoft.com/office/drawing/2014/main" val="1593209241"/>
+                    </a:ext>
+                  </a:extLst>
+                </a:gridCol>
+              </a:tblGrid>
+              <a:tr h="410633">
+                <a:tc>
+                  <a:txBody>
+                    <a:bodyPr/>
+                    <a:lstStyle/>
+                    <a:p>
+                      <a:pPr algn="l">
+                        <a:spcBef>
+                          <a:spcPts val="0"/>
+                        </a:spcBef>
+                        <a:spcAft>
+                          <a:spcPts val="0"/>
+                        </a:spcAft>
+                      </a:pPr>
+                      <a:r>
+                        <a:rPr lang="en-US" sz="1620" b="0" i="0">
+                          <a:solidFill>
+                            <a:srgbClr val="40464F"/>
+                          </a:solidFill>
+                          <a:latin typeface="Arial" panose="020B0604020202020204" pitchFamily="34" charset="0"/>
+                        </a:rPr>
+                        <a:t>Planform area</a:t>
+                      </a:r>
+                    </a:p>
+                  </a:txBody>
+                  <a:tcPr marL="50800" marR="50800" marT="25400" marB="12700"/>
+                </a:tc>
+                <a:tc>
+                  <a:txBody>
+                    <a:bodyPr/>
+                    <a:lstStyle/>
+                    <a:p>
+                      <a:pPr algn="l">
+                        <a:spcBef>
+                          <a:spcPts val="0"/>
+                        </a:spcBef>
+                        <a:spcAft>
+                          <a:spcPts val="0"/>
+                        </a:spcAft>
+                      </a:pPr>
+                      <a:r>
+                        <a:rPr lang="en-US" sz="1620" b="0" i="0">
+                          <a:solidFill>
+                            <a:srgbClr val="40464F"/>
+                          </a:solidFill>
+                          <a:latin typeface="Arial" panose="020B0604020202020204" pitchFamily="34" charset="0"/>
+                        </a:rPr>
+                        <a:t>1.625 m^2</a:t>
+                      </a:r>
+                    </a:p>
+                  </a:txBody>
+                  <a:tcPr marL="50800" marR="50800" marT="25400" marB="12700"/>
+                </a:tc>
+                <a:tc>
+                  <a:txBody>
+                    <a:bodyPr/>
+                    <a:lstStyle/>
+                    <a:p>
+                      <a:pPr algn="l">
+                        <a:spcBef>
+                          <a:spcPts val="0"/>
+                        </a:spcBef>
+                        <a:spcAft>
+                          <a:spcPts val="0"/>
+                        </a:spcAft>
+                      </a:pPr>
+                      <a:r>
+                        <a:rPr lang="en-US" sz="1620" b="0" i="0">
+                          <a:solidFill>
+                            <a:srgbClr val="40464F"/>
+                          </a:solidFill>
+                          <a:latin typeface="Arial" panose="020B0604020202020204" pitchFamily="34" charset="0"/>
+                        </a:rPr>
+                        <a:t>Cruise speed</a:t>
+                      </a:r>
+                    </a:p>
+                  </a:txBody>
+                  <a:tcPr marL="50800" marR="50800" marT="25400" marB="12700"/>
+                </a:tc>
+                <a:tc>
+                  <a:txBody>
+                    <a:bodyPr/>
+                    <a:lstStyle/>
+                    <a:p>
+                      <a:pPr algn="l">
+                        <a:spcBef>
+                          <a:spcPts val="0"/>
+                        </a:spcBef>
+                        <a:spcAft>
+                          <a:spcPts val="0"/>
+                        </a:spcAft>
+                      </a:pPr>
+                      <a:r>
+                        <a:rPr lang="en-US" sz="1620" b="0" i="0">
+                          <a:solidFill>
+                            <a:srgbClr val="40464F"/>
+                          </a:solidFill>
+                          <a:latin typeface="Arial" panose="020B0604020202020204" pitchFamily="34" charset="0"/>
+                        </a:rPr>
+                        <a:t>19.95 m/s</a:t>
+                      </a:r>
+                    </a:p>
+                  </a:txBody>
+                  <a:tcPr marL="50800" marR="50800" marT="25400" marB="12700"/>
+                </a:tc>
+                <a:extLst>
+                  <a:ext uri="{0D108BD9-81ED-4DB2-BD59-A6C34878D82A}">
+                    <a16:rowId xmlns:a16="http://schemas.microsoft.com/office/drawing/2014/main" val="3503367134"/>
+                  </a:ext>
+                </a:extLst>
+              </a:tr>
+              <a:tr h="410633">
+                <a:tc>
+                  <a:txBody>
+                    <a:bodyPr/>
+                    <a:lstStyle/>
+                    <a:p>
+                      <a:pPr algn="l">
+                        <a:spcBef>
+                          <a:spcPts val="0"/>
+                        </a:spcBef>
+                        <a:spcAft>
+                          <a:spcPts val="0"/>
+                        </a:spcAft>
+                      </a:pPr>
+                      <a:r>
+                        <a:rPr lang="en-US" sz="1620" b="0" i="0">
+                          <a:solidFill>
+                            <a:srgbClr val="40464F"/>
+                          </a:solidFill>
+                          <a:latin typeface="Arial" panose="020B0604020202020204" pitchFamily="34" charset="0"/>
+                        </a:rPr>
+                        <a:t>Span</a:t>
+                      </a:r>
+                    </a:p>
+                  </a:txBody>
+                  <a:tcPr marL="50800" marR="50800" marT="25400" marB="12700"/>
+                </a:tc>
+                <a:tc>
+                  <a:txBody>
+                    <a:bodyPr/>
+                    <a:lstStyle/>
+                    <a:p>
+                      <a:pPr algn="l">
+                        <a:spcBef>
+                          <a:spcPts val="0"/>
+                        </a:spcBef>
+                        <a:spcAft>
+                          <a:spcPts val="0"/>
+                        </a:spcAft>
+                      </a:pPr>
+                      <a:r>
+                        <a:rPr lang="en-US" sz="1620" b="0" i="0">
+                          <a:solidFill>
+                            <a:srgbClr val="40464F"/>
+                          </a:solidFill>
+                          <a:latin typeface="Arial" panose="020B0604020202020204" pitchFamily="34" charset="0"/>
+                        </a:rPr>
+                        <a:t>3.025 m</a:t>
+                      </a:r>
+                    </a:p>
+                  </a:txBody>
+                  <a:tcPr marL="50800" marR="50800" marT="25400" marB="12700"/>
+                </a:tc>
+                <a:tc>
+                  <a:txBody>
+                    <a:bodyPr/>
+                    <a:lstStyle/>
+                    <a:p>
+                      <a:pPr algn="l">
+                        <a:spcBef>
+                          <a:spcPts val="0"/>
+                        </a:spcBef>
+                        <a:spcAft>
+                          <a:spcPts val="0"/>
+                        </a:spcAft>
+                      </a:pPr>
+                      <a:r>
+                        <a:rPr lang="en-US" sz="1620" b="0" i="0">
+                          <a:solidFill>
+                            <a:srgbClr val="40464F"/>
+                          </a:solidFill>
+                          <a:latin typeface="Arial" panose="020B0604020202020204" pitchFamily="34" charset="0"/>
+                        </a:rPr>
+                        <a:t>Takeoff speed</a:t>
+                      </a:r>
+                    </a:p>
+                  </a:txBody>
+                  <a:tcPr marL="50800" marR="50800" marT="25400" marB="12700"/>
+                </a:tc>
+                <a:tc>
+                  <a:txBody>
+                    <a:bodyPr/>
+                    <a:lstStyle/>
+                    <a:p>
+                      <a:pPr algn="l">
+                        <a:spcBef>
+                          <a:spcPts val="0"/>
+                        </a:spcBef>
+                        <a:spcAft>
+                          <a:spcPts val="0"/>
+                        </a:spcAft>
+                      </a:pPr>
+                      <a:r>
+                        <a:rPr lang="en-US" sz="1620" b="0" i="0">
+                          <a:solidFill>
+                            <a:srgbClr val="40464F"/>
+                          </a:solidFill>
+                          <a:latin typeface="Arial" panose="020B0604020202020204" pitchFamily="34" charset="0"/>
+                        </a:rPr>
+                        <a:t>13.34 m/s</a:t>
+                      </a:r>
+                    </a:p>
+                  </a:txBody>
+                  <a:tcPr marL="50800" marR="50800" marT="25400" marB="12700"/>
+                </a:tc>
+                <a:extLst>
+                  <a:ext uri="{0D108BD9-81ED-4DB2-BD59-A6C34878D82A}">
+                    <a16:rowId xmlns:a16="http://schemas.microsoft.com/office/drawing/2014/main" val="848969109"/>
+                  </a:ext>
+                </a:extLst>
+              </a:tr>
+              <a:tr h="410633">
+                <a:tc>
+                  <a:txBody>
+                    <a:bodyPr/>
+                    <a:lstStyle/>
+                    <a:p>
+                      <a:pPr algn="l">
+                        <a:spcBef>
+                          <a:spcPts val="0"/>
+                        </a:spcBef>
+                        <a:spcAft>
+                          <a:spcPts val="0"/>
+                        </a:spcAft>
+                      </a:pPr>
+                      <a:r>
+                        <a:rPr lang="en-US" sz="1620" b="0" i="0">
+                          <a:solidFill>
+                            <a:srgbClr val="40464F"/>
+                          </a:solidFill>
+                          <a:latin typeface="Arial" panose="020B0604020202020204" pitchFamily="34" charset="0"/>
+                        </a:rPr>
+                        <a:t>Aspect ratio</a:t>
+                      </a:r>
+                    </a:p>
+                  </a:txBody>
+                  <a:tcPr marL="50800" marR="50800" marT="25400" marB="12700"/>
+                </a:tc>
+                <a:tc>
+                  <a:txBody>
+                    <a:bodyPr/>
+                    <a:lstStyle/>
+                    <a:p>
+                      <a:pPr algn="l">
+                        <a:spcBef>
+                          <a:spcPts val="0"/>
+                        </a:spcBef>
+                        <a:spcAft>
+                          <a:spcPts val="0"/>
+                        </a:spcAft>
+                      </a:pPr>
+                      <a:r>
+                        <a:rPr lang="en-US" sz="1620" b="0" i="0">
+                          <a:solidFill>
+                            <a:srgbClr val="40464F"/>
+                          </a:solidFill>
+                          <a:latin typeface="Arial" panose="020B0604020202020204" pitchFamily="34" charset="0"/>
+                        </a:rPr>
+                        <a:t>5.63</a:t>
+                      </a:r>
+                    </a:p>
+                  </a:txBody>
+                  <a:tcPr marL="50800" marR="50800" marT="25400" marB="12700"/>
+                </a:tc>
+                <a:tc>
+                  <a:txBody>
+                    <a:bodyPr/>
+                    <a:lstStyle/>
+                    <a:p>
+                      <a:pPr algn="l">
+                        <a:spcBef>
+                          <a:spcPts val="0"/>
+                        </a:spcBef>
+                        <a:spcAft>
+                          <a:spcPts val="0"/>
+                        </a:spcAft>
+                      </a:pPr>
+                      <a:r>
+                        <a:rPr lang="en-US" sz="1620" b="0" i="0">
+                          <a:solidFill>
+                            <a:srgbClr val="40464F"/>
+                          </a:solidFill>
+                          <a:latin typeface="Arial" panose="020B0604020202020204" pitchFamily="34" charset="0"/>
+                        </a:rPr>
+                        <a:t>Cruise angle of attack</a:t>
+                      </a:r>
+                    </a:p>
+                  </a:txBody>
+                  <a:tcPr marL="50800" marR="50800" marT="25400" marB="12700"/>
+                </a:tc>
+                <a:tc>
+                  <a:txBody>
+                    <a:bodyPr/>
+                    <a:lstStyle/>
+                    <a:p>
+                      <a:pPr algn="l">
+                        <a:spcBef>
+                          <a:spcPts val="0"/>
+                        </a:spcBef>
+                        <a:spcAft>
+                          <a:spcPts val="0"/>
+                        </a:spcAft>
+                      </a:pPr>
+                      <a:r>
+                        <a:rPr lang="en-US" sz="1620" b="0" i="0">
+                          <a:solidFill>
+                            <a:srgbClr val="40464F"/>
+                          </a:solidFill>
+                          <a:latin typeface="Arial" panose="020B0604020202020204" pitchFamily="34" charset="0"/>
+                        </a:rPr>
+                        <a:t>0.00 deg</a:t>
+                      </a:r>
+                    </a:p>
+                  </a:txBody>
+                  <a:tcPr marL="50800" marR="50800" marT="25400" marB="12700"/>
+                </a:tc>
+                <a:extLst>
+                  <a:ext uri="{0D108BD9-81ED-4DB2-BD59-A6C34878D82A}">
+                    <a16:rowId xmlns:a16="http://schemas.microsoft.com/office/drawing/2014/main" val="2983974947"/>
+                  </a:ext>
+                </a:extLst>
+              </a:tr>
+              <a:tr h="410633">
+                <a:tc>
+                  <a:txBody>
+                    <a:bodyPr/>
+                    <a:lstStyle/>
+                    <a:p>
+                      <a:pPr algn="l">
+                        <a:spcBef>
+                          <a:spcPts val="0"/>
+                        </a:spcBef>
+                        <a:spcAft>
+                          <a:spcPts val="0"/>
+                        </a:spcAft>
+                      </a:pPr>
+                      <a:r>
+                        <a:rPr lang="en-US" sz="1620" b="0" i="0">
+                          <a:solidFill>
+                            <a:srgbClr val="40464F"/>
+                          </a:solidFill>
+                          <a:latin typeface="Arial" panose="020B0604020202020204" pitchFamily="34" charset="0"/>
+                        </a:rPr>
+                        <a:t>Gross weight</a:t>
+                      </a:r>
+                    </a:p>
+                  </a:txBody>
+                  <a:tcPr marL="50800" marR="50800" marT="25400" marB="12700"/>
+                </a:tc>
+                <a:tc>
+                  <a:txBody>
+                    <a:bodyPr/>
+                    <a:lstStyle/>
+                    <a:p>
+                      <a:pPr algn="l">
+                        <a:spcBef>
+                          <a:spcPts val="0"/>
+                        </a:spcBef>
+                        <a:spcAft>
+                          <a:spcPts val="0"/>
+                        </a:spcAft>
+                      </a:pPr>
+                      <a:r>
+                        <a:rPr lang="en-US" sz="1620" b="0" i="0">
+                          <a:solidFill>
+                            <a:srgbClr val="40464F"/>
+                          </a:solidFill>
+                          <a:latin typeface="Arial" panose="020B0604020202020204" pitchFamily="34" charset="0"/>
+                        </a:rPr>
+                        <a:t>12.0 kg</a:t>
+                      </a:r>
+                    </a:p>
+                  </a:txBody>
+                  <a:tcPr marL="50800" marR="50800" marT="25400" marB="12700"/>
+                </a:tc>
+                <a:tc>
+                  <a:txBody>
+                    <a:bodyPr/>
+                    <a:lstStyle/>
+                    <a:p>
+                      <a:pPr algn="l">
+                        <a:spcBef>
+                          <a:spcPts val="0"/>
+                        </a:spcBef>
+                        <a:spcAft>
+                          <a:spcPts val="0"/>
+                        </a:spcAft>
+                      </a:pPr>
+                      <a:r>
+                        <a:rPr lang="en-US" sz="1620" b="0" i="0">
+                          <a:solidFill>
+                            <a:srgbClr val="40464F"/>
+                          </a:solidFill>
+                          <a:latin typeface="Arial" panose="020B0604020202020204" pitchFamily="34" charset="0"/>
+                        </a:rPr>
+                        <a:t>Takeoff angle of attack</a:t>
+                      </a:r>
+                    </a:p>
+                  </a:txBody>
+                  <a:tcPr marL="50800" marR="50800" marT="25400" marB="12700"/>
+                </a:tc>
+                <a:tc>
+                  <a:txBody>
+                    <a:bodyPr/>
+                    <a:lstStyle/>
+                    <a:p>
+                      <a:pPr algn="l">
+                        <a:spcBef>
+                          <a:spcPts val="0"/>
+                        </a:spcBef>
+                        <a:spcAft>
+                          <a:spcPts val="0"/>
+                        </a:spcAft>
+                      </a:pPr>
+                      <a:r>
+                        <a:rPr lang="en-US" sz="1620" b="0" i="0">
+                          <a:solidFill>
+                            <a:srgbClr val="40464F"/>
+                          </a:solidFill>
+                          <a:latin typeface="Arial" panose="020B0604020202020204" pitchFamily="34" charset="0"/>
+                        </a:rPr>
+                        <a:t>5.09 deg</a:t>
+                      </a:r>
+                    </a:p>
+                  </a:txBody>
+                  <a:tcPr marL="50800" marR="50800" marT="25400" marB="12700"/>
+                </a:tc>
+                <a:extLst>
+                  <a:ext uri="{0D108BD9-81ED-4DB2-BD59-A6C34878D82A}">
+                    <a16:rowId xmlns:a16="http://schemas.microsoft.com/office/drawing/2014/main" val="2100003985"/>
+                  </a:ext>
+                </a:extLst>
+              </a:tr>
+              <a:tr h="410633">
+                <a:tc>
+                  <a:txBody>
+                    <a:bodyPr/>
+                    <a:lstStyle/>
+                    <a:p>
+                      <a:pPr algn="l">
+                        <a:spcBef>
+                          <a:spcPts val="0"/>
+                        </a:spcBef>
+                        <a:spcAft>
+                          <a:spcPts val="0"/>
+                        </a:spcAft>
+                      </a:pPr>
+                      <a:r>
+                        <a:rPr lang="en-US" sz="1620" b="0" i="0">
+                          <a:solidFill>
+                            <a:srgbClr val="40464F"/>
+                          </a:solidFill>
+                          <a:latin typeface="Arial" panose="020B0604020202020204" pitchFamily="34" charset="0"/>
+                        </a:rPr>
+                        <a:t>Lift target</a:t>
+                      </a:r>
+                    </a:p>
+                  </a:txBody>
+                  <a:tcPr marL="50800" marR="50800" marT="25400" marB="12700"/>
+                </a:tc>
+                <a:tc>
+                  <a:txBody>
+                    <a:bodyPr/>
+                    <a:lstStyle/>
+                    <a:p>
+                      <a:pPr algn="l">
+                        <a:spcBef>
+                          <a:spcPts val="0"/>
+                        </a:spcBef>
+                        <a:spcAft>
+                          <a:spcPts val="0"/>
+                        </a:spcAft>
+                      </a:pPr>
+                      <a:r>
+                        <a:rPr lang="en-US" sz="1620" b="0" i="0">
+                          <a:solidFill>
+                            <a:srgbClr val="40464F"/>
+                          </a:solidFill>
+                          <a:latin typeface="Arial" panose="020B0604020202020204" pitchFamily="34" charset="0"/>
+                        </a:rPr>
+                        <a:t>Bell-shaped</a:t>
+                      </a:r>
+                    </a:p>
+                  </a:txBody>
+                  <a:tcPr marL="50800" marR="50800" marT="25400" marB="12700"/>
+                </a:tc>
+                <a:tc>
+                  <a:txBody>
+                    <a:bodyPr/>
+                    <a:lstStyle/>
+                    <a:p>
+                      <a:pPr algn="l">
+                        <a:spcBef>
+                          <a:spcPts val="0"/>
+                        </a:spcBef>
+                        <a:spcAft>
+                          <a:spcPts val="0"/>
+                        </a:spcAft>
+                      </a:pPr>
+                      <a:r>
+                        <a:rPr lang="en-US" sz="1620" b="0" i="0">
+                          <a:solidFill>
+                            <a:srgbClr val="40464F"/>
+                          </a:solidFill>
+                          <a:latin typeface="Arial" panose="020B0604020202020204" pitchFamily="34" charset="0"/>
+                        </a:rPr>
+                        <a:t>Control surface</a:t>
+                      </a:r>
+                    </a:p>
+                  </a:txBody>
+                  <a:tcPr marL="50800" marR="50800" marT="25400" marB="12700"/>
+                </a:tc>
+                <a:tc>
+                  <a:txBody>
+                    <a:bodyPr/>
+                    <a:lstStyle/>
+                    <a:p>
+                      <a:pPr algn="l">
+                        <a:spcBef>
+                          <a:spcPts val="0"/>
+                        </a:spcBef>
+                        <a:spcAft>
+                          <a:spcPts val="0"/>
+                        </a:spcAft>
+                      </a:pPr>
+                      <a:r>
+                        <a:rPr lang="en-US" sz="1620" b="0" i="0">
+                          <a:solidFill>
+                            <a:srgbClr val="40464F"/>
+                          </a:solidFill>
+                          <a:latin typeface="Arial" panose="020B0604020202020204" pitchFamily="34" charset="0"/>
+                        </a:rPr>
+                        <a:t>Single elevon set</a:t>
+                      </a:r>
+                    </a:p>
+                  </a:txBody>
+                  <a:tcPr marL="50800" marR="50800" marT="25400" marB="12700"/>
+                </a:tc>
+                <a:extLst>
+                  <a:ext uri="{0D108BD9-81ED-4DB2-BD59-A6C34878D82A}">
+                    <a16:rowId xmlns:a16="http://schemas.microsoft.com/office/drawing/2014/main" val="2644837566"/>
+                  </a:ext>
+                </a:extLst>
+              </a:tr>
+              <a:tr h="410633">
+                <a:tc>
+                  <a:txBody>
+                    <a:bodyPr/>
+                    <a:lstStyle/>
+                    <a:p>
+                      <a:pPr algn="l">
+                        <a:spcBef>
+                          <a:spcPts val="0"/>
+                        </a:spcBef>
+                        <a:spcAft>
+                          <a:spcPts val="0"/>
+                        </a:spcAft>
+                      </a:pPr>
+                      <a:r>
+                        <a:rPr lang="en-US" sz="1620" b="0" i="0">
+                          <a:solidFill>
+                            <a:srgbClr val="40464F"/>
+                          </a:solidFill>
+                          <a:latin typeface="Arial" panose="020B0604020202020204" pitchFamily="34" charset="0"/>
+                        </a:rPr>
+                        <a:t>Static margin</a:t>
+                      </a:r>
+                    </a:p>
+                  </a:txBody>
+                  <a:tcPr marL="50800" marR="50800" marT="25400" marB="12700"/>
+                </a:tc>
+                <a:tc>
+                  <a:txBody>
+                    <a:bodyPr/>
+                    <a:lstStyle/>
+                    <a:p>
+                      <a:pPr algn="l">
+                        <a:spcBef>
+                          <a:spcPts val="0"/>
+                        </a:spcBef>
+                        <a:spcAft>
+                          <a:spcPts val="0"/>
+                        </a:spcAft>
+                      </a:pPr>
+                      <a:r>
+                        <a:rPr lang="en-US" sz="1620" b="0" i="0">
+                          <a:solidFill>
+                            <a:srgbClr val="40464F"/>
+                          </a:solidFill>
+                          <a:latin typeface="Arial" panose="020B0604020202020204" pitchFamily="34" charset="0"/>
+                        </a:rPr>
+                        <a:t>8%</a:t>
+                      </a:r>
+                    </a:p>
+                  </a:txBody>
+                  <a:tcPr marL="50800" marR="50800" marT="25400" marB="12700"/>
+                </a:tc>
+                <a:tc>
+                  <a:txBody>
+                    <a:bodyPr/>
+                    <a:lstStyle/>
+                    <a:p>
+                      <a:pPr algn="l">
+                        <a:spcBef>
+                          <a:spcPts val="0"/>
+                        </a:spcBef>
+                        <a:spcAft>
+                          <a:spcPts val="0"/>
+                        </a:spcAft>
+                      </a:pPr>
+                      <a:r>
+                        <a:rPr lang="en-US" sz="1620" b="0" i="0">
+                          <a:solidFill>
+                            <a:srgbClr val="40464F"/>
+                          </a:solidFill>
+                          <a:latin typeface="Arial" panose="020B0604020202020204" pitchFamily="34" charset="0"/>
+                        </a:rPr>
+                        <a:t>Centerbody type</a:t>
+                      </a:r>
+                    </a:p>
+                  </a:txBody>
+                  <a:tcPr marL="50800" marR="50800" marT="25400" marB="12700"/>
+                </a:tc>
+                <a:tc>
+                  <a:txBody>
+                    <a:bodyPr/>
+                    <a:lstStyle/>
+                    <a:p>
+                      <a:pPr algn="l">
+                        <a:spcBef>
+                          <a:spcPts val="0"/>
+                        </a:spcBef>
+                        <a:spcAft>
+                          <a:spcPts val="0"/>
+                        </a:spcAft>
+                      </a:pPr>
+                      <a:r>
+                        <a:rPr lang="en-US" sz="1620" b="0" i="0">
+                          <a:solidFill>
+                            <a:srgbClr val="40464F"/>
+                          </a:solidFill>
+                          <a:latin typeface="Arial" panose="020B0604020202020204" pitchFamily="34" charset="0"/>
+                        </a:rPr>
+                        <a:t>Blended body sections</a:t>
+                      </a:r>
+                    </a:p>
+                  </a:txBody>
+                  <a:tcPr marL="50800" marR="50800" marT="25400" marB="12700"/>
+                </a:tc>
+                <a:extLst>
+                  <a:ext uri="{0D108BD9-81ED-4DB2-BD59-A6C34878D82A}">
+                    <a16:rowId xmlns:a16="http://schemas.microsoft.com/office/drawing/2014/main" val="957011219"/>
+                  </a:ext>
+                </a:extLst>
+              </a:tr>
+            </a:tbl>
+          </a:graphicData>
+        </a:graphic>
+      </p:graphicFrame>
+      <p:sp>
+        <p:nvSpPr>
+          <p:cNvPr id="29" name="TextBox 28">
+            <a:extLst>
+              <a:ext uri="{FF2B5EF4-FFF2-40B4-BE49-F238E27FC236}">
+                <a16:creationId xmlns:a16="http://schemas.microsoft.com/office/drawing/2014/main" id="{479B208B-039F-5360-30A9-D496636F54B9}"/>
+              </a:ext>
+            </a:extLst>
+          </p:cNvPr>
+          <p:cNvSpPr txBox="1"/>
+          <p:nvPr/>
+        </p:nvSpPr>
+        <p:spPr>
+          <a:xfrm>
+            <a:off x="15494000" y="6629400"/>
+            <a:ext cx="14414500" cy="215444"/>
+          </a:xfrm>
+          <a:prstGeom prst="rect">
+            <a:avLst/>
+          </a:prstGeom>
+          <a:noFill/>
+        </p:spPr>
+        <p:txBody>
+          <a:bodyPr vert="horz" wrap="square" lIns="0" tIns="0" rIns="0" bIns="0" rtlCol="0">
+            <a:spAutoFit/>
+          </a:bodyPr>
+          <a:lstStyle/>
+          <a:p>
+            <a:r>
+              <a:rPr lang="en-US" sz="1400">
+                <a:solidFill>
+                  <a:srgbClr val="40464F"/>
+                </a:solidFill>
+                <a:latin typeface="Arial" panose="020B0604020202020204" pitchFamily="34" charset="0"/>
+              </a:rPr>
+              <a:t>Representative design inputs and operating-point conditions for the IntendedValidation2 case used throughout the poster.</a:t>
+            </a:r>
+          </a:p>
+        </p:txBody>
+      </p:sp>
+      <p:sp>
+        <p:nvSpPr>
+          <p:cNvPr id="30" name="Rectangle 29">
+            <a:extLst>
+              <a:ext uri="{FF2B5EF4-FFF2-40B4-BE49-F238E27FC236}">
+                <a16:creationId xmlns:a16="http://schemas.microsoft.com/office/drawing/2014/main" id="{BAADB5D7-65CF-AFF1-53FB-392C74BA3AC5}"/>
+              </a:ext>
+            </a:extLst>
+          </p:cNvPr>
+          <p:cNvSpPr/>
+          <p:nvPr/>
+        </p:nvSpPr>
+        <p:spPr>
+          <a:xfrm>
+            <a:off x="15494000" y="7112000"/>
+            <a:ext cx="14414500" cy="762000"/>
+          </a:xfrm>
+          <a:prstGeom prst="rect">
+            <a:avLst/>
+          </a:prstGeom>
+          <a:solidFill>
+            <a:srgbClr val="044684"/>
+          </a:solidFill>
+          <a:ln w="25400" cap="flat" cmpd="sng" algn="ctr">
+            <a:noFill/>
+            <a:prstDash val="solid"/>
+          </a:ln>
+          <a:effectLst/>
+          <a:extLst>
+            <a:ext uri="{91240B29-F687-4F45-9708-019B960494DF}">
+              <a14:hiddenLine xmlns:a14="http://schemas.microsoft.com/office/drawing/2010/main" w="25400" cap="flat" cmpd="sng" algn="ctr">
+                <a:solidFill>
+                  <a:schemeClr val="accent1">
+                    <a:shade val="15000"/>
+                  </a:schemeClr>
+                </a:solidFill>
+                <a:prstDash val="solid"/>
+              </a14:hiddenLine>
+            </a:ext>
+          </a:extLst>
+        </p:spPr>
+        <p:style>
+          <a:lnRef idx="2">
+            <a:schemeClr val="accent1">
+              <a:shade val="15000"/>
+            </a:schemeClr>
+          </a:lnRef>
+          <a:fillRef idx="1">
+            <a:schemeClr val="accent1"/>
+          </a:fillRef>
+          <a:effectRef idx="0">
+            <a:schemeClr val="accent1"/>
+          </a:effectRef>
+          <a:fontRef idx="minor">
+            <a:schemeClr val="lt1"/>
+          </a:fontRef>
+        </p:style>
+        <p:txBody>
+          <a:bodyPr lIns="127000" tIns="88900" rIns="50800" bIns="25400" rtlCol="0" anchor="ctr"/>
+          <a:lstStyle/>
+          <a:p>
+            <a:r>
+              <a:rPr lang="en-US" sz="2900" b="1">
+                <a:solidFill>
+                  <a:srgbClr val="FFFFFF"/>
+                </a:solidFill>
+                <a:latin typeface="Arial" panose="020B0604020202020204" pitchFamily="34" charset="0"/>
+              </a:rPr>
+              <a:t>Aerodynamic and Twist Results</a:t>
+            </a:r>
+          </a:p>
+        </p:txBody>
+      </p:sp>
+      <p:pic>
+        <p:nvPicPr>
+          <p:cNvPr id="32" name="Picture 31">
+            <a:extLst>
+              <a:ext uri="{FF2B5EF4-FFF2-40B4-BE49-F238E27FC236}">
+                <a16:creationId xmlns:a16="http://schemas.microsoft.com/office/drawing/2014/main" id="{808CB2AD-C48D-5EDE-287D-DC7D958B70FF}"/>
+              </a:ext>
+            </a:extLst>
+          </p:cNvPr>
+          <p:cNvPicPr>
+            <a:picLocks/>
+          </p:cNvPicPr>
+          <p:nvPr/>
+        </p:nvPicPr>
+        <p:blipFill>
+          <a:blip r:embed="rId5" cstate="print">
+            <a:extLst>
+              <a:ext uri="{28A0092B-C50C-407E-A947-70E740481C1C}">
+                <a14:useLocalDpi xmlns:a14="http://schemas.microsoft.com/office/drawing/2010/main" val="0"/>
+              </a:ext>
+            </a:extLst>
+          </a:blip>
+          <a:stretch>
+            <a:fillRect/>
+          </a:stretch>
+        </p:blipFill>
+        <p:spPr>
+          <a:xfrm>
+            <a:off x="15494000" y="7950200"/>
+            <a:ext cx="6604000" cy="4402667"/>
+          </a:xfrm>
+          <a:prstGeom prst="rect">
+            <a:avLst/>
+          </a:prstGeom>
+        </p:spPr>
+      </p:pic>
+      <p:sp>
+        <p:nvSpPr>
+          <p:cNvPr id="33" name="TextBox 32">
+            <a:extLst>
+              <a:ext uri="{FF2B5EF4-FFF2-40B4-BE49-F238E27FC236}">
+                <a16:creationId xmlns:a16="http://schemas.microsoft.com/office/drawing/2014/main" id="{F9C0B747-0B1D-4A40-5602-1EF09A76FA2B}"/>
+              </a:ext>
+            </a:extLst>
+          </p:cNvPr>
+          <p:cNvSpPr txBox="1"/>
+          <p:nvPr/>
+        </p:nvSpPr>
+        <p:spPr>
+          <a:xfrm>
+            <a:off x="15494000" y="12420600"/>
+            <a:ext cx="6604000" cy="215444"/>
+          </a:xfrm>
+          <a:prstGeom prst="rect">
+            <a:avLst/>
+          </a:prstGeom>
+          <a:noFill/>
+        </p:spPr>
+        <p:txBody>
+          <a:bodyPr vert="horz" wrap="square" lIns="0" tIns="0" rIns="0" bIns="0" rtlCol="0">
+            <a:spAutoFit/>
+          </a:bodyPr>
+          <a:lstStyle/>
+          <a:p>
+            <a:r>
+              <a:rPr lang="en-US" sz="1400">
+                <a:solidFill>
+                  <a:srgbClr val="40464F"/>
+                </a:solidFill>
+                <a:latin typeface="Arial" panose="020B0604020202020204" pitchFamily="34" charset="0"/>
+              </a:rPr>
+              <a:t>Lift polar.</a:t>
+            </a:r>
+          </a:p>
+        </p:txBody>
+      </p:sp>
+      <p:pic>
+        <p:nvPicPr>
+          <p:cNvPr id="35" name="Picture 34">
+            <a:extLst>
+              <a:ext uri="{FF2B5EF4-FFF2-40B4-BE49-F238E27FC236}">
+                <a16:creationId xmlns:a16="http://schemas.microsoft.com/office/drawing/2014/main" id="{DA8BD070-D77E-927E-A61C-C81F82C65195}"/>
+              </a:ext>
+            </a:extLst>
+          </p:cNvPr>
+          <p:cNvPicPr>
+            <a:picLocks/>
+          </p:cNvPicPr>
+          <p:nvPr/>
+        </p:nvPicPr>
+        <p:blipFill>
+          <a:blip r:embed="rId6" cstate="print">
+            <a:extLst>
+              <a:ext uri="{28A0092B-C50C-407E-A947-70E740481C1C}">
+                <a14:useLocalDpi xmlns:a14="http://schemas.microsoft.com/office/drawing/2010/main" val="0"/>
+              </a:ext>
+            </a:extLst>
+          </a:blip>
+          <a:stretch>
+            <a:fillRect/>
+          </a:stretch>
+        </p:blipFill>
+        <p:spPr>
+          <a:xfrm>
+            <a:off x="22504400" y="7950200"/>
+            <a:ext cx="6604000" cy="4402667"/>
+          </a:xfrm>
+          <a:prstGeom prst="rect">
+            <a:avLst/>
+          </a:prstGeom>
+        </p:spPr>
+      </p:pic>
+      <p:sp>
+        <p:nvSpPr>
+          <p:cNvPr id="36" name="TextBox 35">
+            <a:extLst>
+              <a:ext uri="{FF2B5EF4-FFF2-40B4-BE49-F238E27FC236}">
+                <a16:creationId xmlns:a16="http://schemas.microsoft.com/office/drawing/2014/main" id="{6B43A24A-7C03-9177-4F7B-F9754F788A4D}"/>
+              </a:ext>
+            </a:extLst>
+          </p:cNvPr>
+          <p:cNvSpPr txBox="1"/>
+          <p:nvPr/>
+        </p:nvSpPr>
+        <p:spPr>
+          <a:xfrm>
+            <a:off x="22504400" y="12420600"/>
+            <a:ext cx="6604000" cy="215444"/>
+          </a:xfrm>
+          <a:prstGeom prst="rect">
+            <a:avLst/>
+          </a:prstGeom>
+          <a:noFill/>
+        </p:spPr>
+        <p:txBody>
+          <a:bodyPr vert="horz" wrap="square" lIns="0" tIns="0" rIns="0" bIns="0" rtlCol="0">
+            <a:spAutoFit/>
+          </a:bodyPr>
+          <a:lstStyle/>
+          <a:p>
+            <a:r>
+              <a:rPr lang="en-US" sz="1400">
+                <a:solidFill>
+                  <a:srgbClr val="40464F"/>
+                </a:solidFill>
+                <a:latin typeface="Arial" panose="020B0604020202020204" pitchFamily="34" charset="0"/>
+              </a:rPr>
+              <a:t>Drag polar.</a:t>
+            </a:r>
+          </a:p>
+        </p:txBody>
+      </p:sp>
+      <p:sp>
+        <p:nvSpPr>
+          <p:cNvPr id="37" name="TextBox 36">
+            <a:extLst>
+              <a:ext uri="{FF2B5EF4-FFF2-40B4-BE49-F238E27FC236}">
+                <a16:creationId xmlns:a16="http://schemas.microsoft.com/office/drawing/2014/main" id="{3F542D34-0FCA-B5CB-CE6A-2AB4C6F685B5}"/>
+              </a:ext>
+            </a:extLst>
+          </p:cNvPr>
+          <p:cNvSpPr txBox="1"/>
+          <p:nvPr/>
+        </p:nvSpPr>
+        <p:spPr>
+          <a:xfrm>
+            <a:off x="15494000" y="12852400"/>
+            <a:ext cx="14414500" cy="1107996"/>
+          </a:xfrm>
+          <a:prstGeom prst="rect">
+            <a:avLst/>
+          </a:prstGeom>
+          <a:noFill/>
+        </p:spPr>
+        <p:txBody>
+          <a:bodyPr vert="horz" wrap="square" lIns="25400" tIns="0" rIns="25400" bIns="0" rtlCol="0">
+            <a:spAutoFit/>
+          </a:bodyPr>
+          <a:lstStyle/>
+          <a:p>
+            <a:pPr marL="342900" indent="-342900">
+              <a:buFont typeface="+mj-lt"/>
+              <a:buChar char="•"/>
+            </a:pPr>
+            <a:r>
+              <a:rPr lang="en-US" sz="1800">
+                <a:solidFill>
+                  <a:srgbClr val="40464F"/>
+                </a:solidFill>
+                <a:latin typeface="Arial" panose="020B0604020202020204" pitchFamily="34" charset="0"/>
+              </a:rPr>
+              <a:t>Cruise operating point: C_L = 0.300, C_D = 0.0129, L over D = 23.21 at 0 degrees angle of attack.</a:t>
+            </a:r>
+          </a:p>
+          <a:p>
+            <a:pPr marL="342900" indent="-342900">
+              <a:buFont typeface="+mj-lt"/>
+              <a:buChar char="•"/>
+            </a:pPr>
+            <a:r>
+              <a:rPr lang="en-US" sz="1800">
+                <a:solidFill>
+                  <a:srgbClr val="40464F"/>
+                </a:solidFill>
+                <a:latin typeface="Arial" panose="020B0604020202020204" pitchFamily="34" charset="0"/>
+              </a:rPr>
+              <a:t>Takeoff operating point: C_L = 0.730, C_D = 0.0456, L over D = 16.02 at 5.09 degrees angle of attack.</a:t>
+            </a:r>
+          </a:p>
+          <a:p>
+            <a:pPr marL="342900" indent="-342900">
+              <a:buFont typeface="+mj-lt"/>
+              <a:buChar char="•"/>
+            </a:pPr>
+            <a:r>
+              <a:rPr lang="en-US" sz="1800">
+                <a:solidFill>
+                  <a:srgbClr val="40464F"/>
+                </a:solidFill>
+                <a:latin typeface="Arial" panose="020B0604020202020204" pitchFamily="34" charset="0"/>
+              </a:rPr>
+              <a:t>Optimized twist still trends from approximately plus 3.29 degrees inboard to minus 1.48 degrees outboard, but the figure is omitted here to prioritize space for validation and case-definition content.</a:t>
+            </a:r>
+          </a:p>
+        </p:txBody>
+      </p:sp>
+      <p:sp>
+        <p:nvSpPr>
+          <p:cNvPr id="38" name="Rectangle 37">
+            <a:extLst>
+              <a:ext uri="{FF2B5EF4-FFF2-40B4-BE49-F238E27FC236}">
+                <a16:creationId xmlns:a16="http://schemas.microsoft.com/office/drawing/2014/main" id="{C39AD4CB-747A-0117-0FB3-866950A5689B}"/>
+              </a:ext>
+            </a:extLst>
+          </p:cNvPr>
+          <p:cNvSpPr/>
+          <p:nvPr/>
+        </p:nvSpPr>
+        <p:spPr>
+          <a:xfrm>
+            <a:off x="15494000" y="15316200"/>
+            <a:ext cx="14414500" cy="762000"/>
+          </a:xfrm>
+          <a:prstGeom prst="rect">
+            <a:avLst/>
+          </a:prstGeom>
+          <a:solidFill>
+            <a:srgbClr val="044684"/>
+          </a:solidFill>
+          <a:ln w="25400" cap="flat" cmpd="sng" algn="ctr">
+            <a:noFill/>
+            <a:prstDash val="solid"/>
+          </a:ln>
+          <a:effectLst/>
+          <a:extLst>
+            <a:ext uri="{91240B29-F687-4F45-9708-019B960494DF}">
+              <a14:hiddenLine xmlns:a14="http://schemas.microsoft.com/office/drawing/2010/main" w="25400" cap="flat" cmpd="sng" algn="ctr">
+                <a:solidFill>
+                  <a:schemeClr val="accent1">
+                    <a:shade val="15000"/>
+                  </a:schemeClr>
+                </a:solidFill>
+                <a:prstDash val="solid"/>
+              </a14:hiddenLine>
+            </a:ext>
+          </a:extLst>
+        </p:spPr>
+        <p:style>
+          <a:lnRef idx="2">
+            <a:schemeClr val="accent1">
+              <a:shade val="15000"/>
+            </a:schemeClr>
+          </a:lnRef>
+          <a:fillRef idx="1">
+            <a:schemeClr val="accent1"/>
+          </a:fillRef>
+          <a:effectRef idx="0">
+            <a:schemeClr val="accent1"/>
+          </a:effectRef>
+          <a:fontRef idx="minor">
+            <a:schemeClr val="lt1"/>
+          </a:fontRef>
+        </p:style>
+        <p:txBody>
+          <a:bodyPr lIns="127000" tIns="88900" rIns="50800" bIns="25400" rtlCol="0" anchor="ctr"/>
+          <a:lstStyle/>
+          <a:p>
+            <a:r>
+              <a:rPr lang="en-US" sz="2900" b="1">
+                <a:solidFill>
+                  <a:srgbClr val="FFFFFF"/>
+                </a:solidFill>
+                <a:latin typeface="Arial" panose="020B0604020202020204" pitchFamily="34" charset="0"/>
+              </a:rPr>
+              <a:t>Integrated Structure and Mission Outputs</a:t>
+            </a:r>
+          </a:p>
+        </p:txBody>
+      </p:sp>
+      <p:sp>
+        <p:nvSpPr>
+          <p:cNvPr id="39" name="TextBox 38">
+            <a:extLst>
+              <a:ext uri="{FF2B5EF4-FFF2-40B4-BE49-F238E27FC236}">
+                <a16:creationId xmlns:a16="http://schemas.microsoft.com/office/drawing/2014/main" id="{DBC902AB-DBBC-B42E-7E57-B98911AE4110}"/>
+              </a:ext>
+            </a:extLst>
+          </p:cNvPr>
+          <p:cNvSpPr txBox="1"/>
+          <p:nvPr/>
+        </p:nvSpPr>
+        <p:spPr>
+          <a:xfrm>
+            <a:off x="15494000" y="16179800"/>
+            <a:ext cx="6604000" cy="307777"/>
+          </a:xfrm>
+          <a:prstGeom prst="rect">
+            <a:avLst/>
+          </a:prstGeom>
+          <a:noFill/>
+        </p:spPr>
+        <p:txBody>
+          <a:bodyPr vert="horz" wrap="square" lIns="25400" tIns="0" rIns="25400" bIns="0" rtlCol="0">
+            <a:spAutoFit/>
+          </a:bodyPr>
+          <a:lstStyle/>
+          <a:p>
+            <a:r>
+              <a:rPr lang="en-US" sz="2000" b="1">
+                <a:solidFill>
+                  <a:srgbClr val="044684"/>
+                </a:solidFill>
+                <a:latin typeface="Arial" panose="020B0604020202020204" pitchFamily="34" charset="0"/>
+              </a:rPr>
+              <a:t>Structure</a:t>
+            </a:r>
+          </a:p>
+        </p:txBody>
+      </p:sp>
+      <p:sp>
+        <p:nvSpPr>
+          <p:cNvPr id="40" name="TextBox 39">
+            <a:extLst>
+              <a:ext uri="{FF2B5EF4-FFF2-40B4-BE49-F238E27FC236}">
+                <a16:creationId xmlns:a16="http://schemas.microsoft.com/office/drawing/2014/main" id="{DD13088C-4854-2802-50F2-ED02D243FC6A}"/>
+              </a:ext>
+            </a:extLst>
+          </p:cNvPr>
+          <p:cNvSpPr txBox="1"/>
+          <p:nvPr/>
+        </p:nvSpPr>
+        <p:spPr>
+          <a:xfrm>
+            <a:off x="15494000" y="16535400"/>
+            <a:ext cx="6604000" cy="1346522"/>
+          </a:xfrm>
+          <a:prstGeom prst="rect">
+            <a:avLst/>
+          </a:prstGeom>
+          <a:noFill/>
+        </p:spPr>
+        <p:txBody>
+          <a:bodyPr vert="horz" wrap="square" lIns="25400" tIns="0" rIns="25400" bIns="0" rtlCol="0">
+            <a:spAutoFit/>
+          </a:bodyPr>
+          <a:lstStyle/>
+          <a:p>
+            <a:r>
+              <a:rPr lang="en-US" sz="1750">
+                <a:solidFill>
+                  <a:srgbClr val="40464F"/>
+                </a:solidFill>
+                <a:latin typeface="Consolas" panose="020B0609020204030204" pitchFamily="49" charset="0"/>
+              </a:rPr>
+              <a:t>Structural mass      2.363 kg</a:t>
+            </a:r>
+          </a:p>
+          <a:p>
+            <a:r>
+              <a:rPr lang="en-US" sz="1750">
+                <a:solidFill>
+                  <a:srgbClr val="40464F"/>
+                </a:solidFill>
+                <a:latin typeface="Consolas" panose="020B0609020204030204" pitchFamily="49" charset="0"/>
+              </a:rPr>
+              <a:t>Tip deflection      2.27 mm</a:t>
+            </a:r>
+          </a:p>
+          <a:p>
+            <a:r>
+              <a:rPr lang="en-US" sz="1750">
+                <a:solidFill>
+                  <a:srgbClr val="40464F"/>
+                </a:solidFill>
+                <a:latin typeface="Consolas" panose="020B0609020204030204" pitchFamily="49" charset="0"/>
+              </a:rPr>
+              <a:t>Tip twist           0.197 deg</a:t>
+            </a:r>
+          </a:p>
+          <a:p>
+            <a:r>
+              <a:rPr lang="en-US" sz="1750">
+                <a:solidFill>
+                  <a:srgbClr val="40464F"/>
+                </a:solidFill>
+                <a:latin typeface="Consolas" panose="020B0609020204030204" pitchFamily="49" charset="0"/>
+              </a:rPr>
+              <a:t>Min rib crushing margin  0.97</a:t>
+            </a:r>
+          </a:p>
+          <a:p>
+            <a:r>
+              <a:rPr lang="en-US" sz="1750">
+                <a:solidFill>
+                  <a:srgbClr val="40464F"/>
+                </a:solidFill>
+                <a:latin typeface="Consolas" panose="020B0609020204030204" pitchFamily="49" charset="0"/>
+              </a:rPr>
+              <a:t>Feasibility flag    False</a:t>
+            </a:r>
+          </a:p>
+        </p:txBody>
+      </p:sp>
+      <p:sp>
+        <p:nvSpPr>
+          <p:cNvPr id="41" name="TextBox 40">
+            <a:extLst>
+              <a:ext uri="{FF2B5EF4-FFF2-40B4-BE49-F238E27FC236}">
+                <a16:creationId xmlns:a16="http://schemas.microsoft.com/office/drawing/2014/main" id="{91866AB5-194A-E30B-1D31-7B0C6571A99F}"/>
+              </a:ext>
+            </a:extLst>
+          </p:cNvPr>
+          <p:cNvSpPr txBox="1"/>
+          <p:nvPr/>
+        </p:nvSpPr>
+        <p:spPr>
+          <a:xfrm>
+            <a:off x="15494000" y="18237200"/>
+            <a:ext cx="6604000" cy="430887"/>
+          </a:xfrm>
+          <a:prstGeom prst="rect">
+            <a:avLst/>
+          </a:prstGeom>
+          <a:noFill/>
+        </p:spPr>
+        <p:txBody>
+          <a:bodyPr vert="horz" wrap="square" lIns="0" tIns="0" rIns="0" bIns="0" rtlCol="0">
+            <a:spAutoFit/>
+          </a:bodyPr>
+          <a:lstStyle/>
+          <a:p>
+            <a:r>
+              <a:rPr lang="en-US" sz="1400">
+                <a:solidFill>
+                  <a:srgbClr val="40464F"/>
+                </a:solidFill>
+                <a:latin typeface="Arial" panose="020B0604020202020204" pitchFamily="34" charset="0"/>
+              </a:rPr>
+              <a:t>The structure is globally light and stiff, but a local rib-crushing mode remains slightly below unity and governs feasibility.</a:t>
+            </a:r>
+          </a:p>
+        </p:txBody>
+      </p:sp>
+      <p:sp>
+        <p:nvSpPr>
+          <p:cNvPr id="42" name="TextBox 41">
+            <a:extLst>
+              <a:ext uri="{FF2B5EF4-FFF2-40B4-BE49-F238E27FC236}">
+                <a16:creationId xmlns:a16="http://schemas.microsoft.com/office/drawing/2014/main" id="{58ACB375-C53F-EE62-7AAF-6679E08FFE9F}"/>
+              </a:ext>
+            </a:extLst>
+          </p:cNvPr>
+          <p:cNvSpPr txBox="1"/>
+          <p:nvPr/>
+        </p:nvSpPr>
+        <p:spPr>
+          <a:xfrm>
+            <a:off x="22796500" y="16179800"/>
+            <a:ext cx="6604000" cy="307777"/>
+          </a:xfrm>
+          <a:prstGeom prst="rect">
+            <a:avLst/>
+          </a:prstGeom>
+          <a:noFill/>
+        </p:spPr>
+        <p:txBody>
+          <a:bodyPr vert="horz" wrap="square" lIns="25400" tIns="0" rIns="25400" bIns="0" rtlCol="0">
+            <a:spAutoFit/>
+          </a:bodyPr>
+          <a:lstStyle/>
+          <a:p>
+            <a:r>
+              <a:rPr lang="en-US" sz="2000" b="1">
+                <a:solidFill>
+                  <a:srgbClr val="044684"/>
+                </a:solidFill>
+                <a:latin typeface="Arial" panose="020B0604020202020204" pitchFamily="34" charset="0"/>
+              </a:rPr>
+              <a:t>Mission</a:t>
+            </a:r>
+          </a:p>
+        </p:txBody>
+      </p:sp>
+      <p:sp>
+        <p:nvSpPr>
+          <p:cNvPr id="43" name="TextBox 42">
+            <a:extLst>
+              <a:ext uri="{FF2B5EF4-FFF2-40B4-BE49-F238E27FC236}">
+                <a16:creationId xmlns:a16="http://schemas.microsoft.com/office/drawing/2014/main" id="{32D4140B-BA96-7590-8D3C-6BC4D545C572}"/>
+              </a:ext>
+            </a:extLst>
+          </p:cNvPr>
+          <p:cNvSpPr txBox="1"/>
+          <p:nvPr/>
+        </p:nvSpPr>
+        <p:spPr>
+          <a:xfrm>
+            <a:off x="22796500" y="16535400"/>
+            <a:ext cx="6604000" cy="1346522"/>
+          </a:xfrm>
+          <a:prstGeom prst="rect">
+            <a:avLst/>
+          </a:prstGeom>
+          <a:noFill/>
+        </p:spPr>
+        <p:txBody>
+          <a:bodyPr vert="horz" wrap="square" lIns="25400" tIns="0" rIns="25400" bIns="0" rtlCol="0">
+            <a:spAutoFit/>
+          </a:bodyPr>
+          <a:lstStyle/>
+          <a:p>
+            <a:r>
+              <a:rPr lang="en-US" sz="1750">
+                <a:solidFill>
+                  <a:srgbClr val="40464F"/>
+                </a:solidFill>
+                <a:latin typeface="Consolas" panose="020B0609020204030204" pitchFamily="49" charset="0"/>
+              </a:rPr>
+              <a:t>Mission completion   9 of 9 phases</a:t>
+            </a:r>
+          </a:p>
+          <a:p>
+            <a:r>
+              <a:rPr lang="en-US" sz="1750">
+                <a:solidFill>
+                  <a:srgbClr val="40464F"/>
+                </a:solidFill>
+                <a:latin typeface="Consolas" panose="020B0609020204030204" pitchFamily="49" charset="0"/>
+              </a:rPr>
+              <a:t>Distance           1283 m</a:t>
+            </a:r>
+          </a:p>
+          <a:p>
+            <a:r>
+              <a:rPr lang="en-US" sz="1750">
+                <a:solidFill>
+                  <a:srgbClr val="40464F"/>
+                </a:solidFill>
+                <a:latin typeface="Consolas" panose="020B0609020204030204" pitchFamily="49" charset="0"/>
+              </a:rPr>
+              <a:t>Energy used        6.64 Wh</a:t>
+            </a:r>
+          </a:p>
+          <a:p>
+            <a:r>
+              <a:rPr lang="en-US" sz="1750">
+                <a:solidFill>
+                  <a:srgbClr val="40464F"/>
+                </a:solidFill>
+                <a:latin typeface="Consolas" panose="020B0609020204030204" pitchFamily="49" charset="0"/>
+              </a:rPr>
+              <a:t>Final SOC          78.1%</a:t>
+            </a:r>
+          </a:p>
+          <a:p>
+            <a:r>
+              <a:rPr lang="en-US" sz="1750">
+                <a:solidFill>
+                  <a:srgbClr val="40464F"/>
+                </a:solidFill>
+                <a:latin typeface="Consolas" panose="020B0609020204030204" pitchFamily="49" charset="0"/>
+              </a:rPr>
+              <a:t>Max electrical power 2.30 kW</a:t>
+            </a:r>
+          </a:p>
+        </p:txBody>
+      </p:sp>
+      <p:sp>
+        <p:nvSpPr>
+          <p:cNvPr id="44" name="TextBox 43">
+            <a:extLst>
+              <a:ext uri="{FF2B5EF4-FFF2-40B4-BE49-F238E27FC236}">
+                <a16:creationId xmlns:a16="http://schemas.microsoft.com/office/drawing/2014/main" id="{6175A16E-FEF2-BDE9-7804-DA04D5E9AEBB}"/>
+              </a:ext>
+            </a:extLst>
+          </p:cNvPr>
+          <p:cNvSpPr txBox="1"/>
+          <p:nvPr/>
+        </p:nvSpPr>
+        <p:spPr>
+          <a:xfrm>
+            <a:off x="22796500" y="18237200"/>
+            <a:ext cx="6604000" cy="430887"/>
+          </a:xfrm>
+          <a:prstGeom prst="rect">
+            <a:avLst/>
+          </a:prstGeom>
+          <a:noFill/>
+        </p:spPr>
+        <p:txBody>
+          <a:bodyPr vert="horz" wrap="square" lIns="0" tIns="0" rIns="0" bIns="0" rtlCol="0">
+            <a:spAutoFit/>
+          </a:bodyPr>
+          <a:lstStyle/>
+          <a:p>
+            <a:r>
+              <a:rPr lang="en-US" sz="1400">
+                <a:solidFill>
+                  <a:srgbClr val="40464F"/>
+                </a:solidFill>
+                <a:latin typeface="Arial" panose="020B0604020202020204" pitchFamily="34" charset="0"/>
+              </a:rPr>
+              <a:t>The same aircraft definition can be evaluated from an energy-use and mission-feasibility perspective without leaving the project framework.</a:t>
+            </a:r>
+          </a:p>
+        </p:txBody>
+      </p:sp>
+      <p:pic>
+        <p:nvPicPr>
+          <p:cNvPr id="46" name="Picture 45">
+            <a:extLst>
+              <a:ext uri="{FF2B5EF4-FFF2-40B4-BE49-F238E27FC236}">
+                <a16:creationId xmlns:a16="http://schemas.microsoft.com/office/drawing/2014/main" id="{246AC950-1870-4C4D-66E5-DCF5A6A0147B}"/>
+              </a:ext>
+            </a:extLst>
+          </p:cNvPr>
+          <p:cNvPicPr>
+            <a:picLocks/>
+          </p:cNvPicPr>
+          <p:nvPr/>
+        </p:nvPicPr>
+        <p:blipFill>
+          <a:blip r:embed="rId7">
+            <a:extLst>
+              <a:ext uri="{28A0092B-C50C-407E-A947-70E740481C1C}">
+                <a14:useLocalDpi xmlns:a14="http://schemas.microsoft.com/office/drawing/2010/main" val="0"/>
+              </a:ext>
+            </a:extLst>
+          </a:blip>
+          <a:stretch>
+            <a:fillRect/>
+          </a:stretch>
+        </p:blipFill>
+        <p:spPr>
+          <a:xfrm>
+            <a:off x="15494000" y="19177000"/>
+            <a:ext cx="14414500" cy="6786827"/>
+          </a:xfrm>
+          <a:prstGeom prst="rect">
+            <a:avLst/>
+          </a:prstGeom>
+        </p:spPr>
+      </p:pic>
+      <p:sp>
+        <p:nvSpPr>
+          <p:cNvPr id="47" name="TextBox 46">
+            <a:extLst>
+              <a:ext uri="{FF2B5EF4-FFF2-40B4-BE49-F238E27FC236}">
+                <a16:creationId xmlns:a16="http://schemas.microsoft.com/office/drawing/2014/main" id="{17368E4E-980E-CD6A-DAF1-39E0960F60EF}"/>
+              </a:ext>
+            </a:extLst>
+          </p:cNvPr>
+          <p:cNvSpPr txBox="1"/>
+          <p:nvPr/>
+        </p:nvSpPr>
+        <p:spPr>
+          <a:xfrm>
+            <a:off x="15494000" y="26009600"/>
+            <a:ext cx="14414500" cy="215444"/>
+          </a:xfrm>
+          <a:prstGeom prst="rect">
+            <a:avLst/>
+          </a:prstGeom>
+          <a:noFill/>
+        </p:spPr>
+        <p:txBody>
+          <a:bodyPr vert="horz" wrap="square" lIns="0" tIns="0" rIns="0" bIns="0" rtlCol="0">
+            <a:spAutoFit/>
+          </a:bodyPr>
+          <a:lstStyle/>
+          <a:p>
+            <a:r>
+              <a:rPr lang="en-US" sz="1400">
+                <a:solidFill>
+                  <a:srgbClr val="40464F"/>
+                </a:solidFill>
+                <a:latin typeface="Arial" panose="020B0604020202020204" pitchFamily="34" charset="0"/>
+              </a:rPr>
+              <a:t>Structural-analysis interface used to inspect stress, margins, and feasibility for the same saved aircraft definition.</a:t>
+            </a:r>
+          </a:p>
+        </p:txBody>
+      </p:sp>
+      <p:sp>
+        <p:nvSpPr>
+          <p:cNvPr id="48" name="Rectangle 47">
+            <a:extLst>
+              <a:ext uri="{FF2B5EF4-FFF2-40B4-BE49-F238E27FC236}">
+                <a16:creationId xmlns:a16="http://schemas.microsoft.com/office/drawing/2014/main" id="{DD75D37D-3C1B-2F8C-CC88-2FECAA735D77}"/>
+              </a:ext>
+            </a:extLst>
+          </p:cNvPr>
+          <p:cNvSpPr/>
+          <p:nvPr/>
+        </p:nvSpPr>
+        <p:spPr>
+          <a:xfrm>
+            <a:off x="15494000" y="26492200"/>
+            <a:ext cx="14414500" cy="762000"/>
+          </a:xfrm>
+          <a:prstGeom prst="rect">
+            <a:avLst/>
+          </a:prstGeom>
+          <a:solidFill>
+            <a:srgbClr val="044684"/>
+          </a:solidFill>
+          <a:ln w="25400" cap="flat" cmpd="sng" algn="ctr">
+            <a:noFill/>
+            <a:prstDash val="solid"/>
+          </a:ln>
+          <a:effectLst/>
+          <a:extLst>
+            <a:ext uri="{91240B29-F687-4F45-9708-019B960494DF}">
+              <a14:hiddenLine xmlns:a14="http://schemas.microsoft.com/office/drawing/2010/main" w="25400" cap="flat" cmpd="sng" algn="ctr">
+                <a:solidFill>
+                  <a:schemeClr val="accent1">
+                    <a:shade val="15000"/>
+                  </a:schemeClr>
+                </a:solidFill>
+                <a:prstDash val="solid"/>
+              </a14:hiddenLine>
+            </a:ext>
+          </a:extLst>
+        </p:spPr>
+        <p:style>
+          <a:lnRef idx="2">
+            <a:schemeClr val="accent1">
+              <a:shade val="15000"/>
+            </a:schemeClr>
+          </a:lnRef>
+          <a:fillRef idx="1">
+            <a:schemeClr val="accent1"/>
+          </a:fillRef>
+          <a:effectRef idx="0">
+            <a:schemeClr val="accent1"/>
+          </a:effectRef>
+          <a:fontRef idx="minor">
+            <a:schemeClr val="lt1"/>
+          </a:fontRef>
+        </p:style>
+        <p:txBody>
+          <a:bodyPr lIns="127000" tIns="88900" rIns="50800" bIns="25400" rtlCol="0" anchor="ctr"/>
+          <a:lstStyle/>
+          <a:p>
+            <a:r>
+              <a:rPr lang="en-US" sz="2900" b="1">
+                <a:solidFill>
+                  <a:srgbClr val="FFFFFF"/>
+                </a:solidFill>
+                <a:latin typeface="Arial" panose="020B0604020202020204" pitchFamily="34" charset="0"/>
+              </a:rPr>
+              <a:t>Case Study Interpretation</a:t>
+            </a:r>
+          </a:p>
+        </p:txBody>
+      </p:sp>
+      <p:sp>
+        <p:nvSpPr>
+          <p:cNvPr id="49" name="TextBox 48">
+            <a:extLst>
+              <a:ext uri="{FF2B5EF4-FFF2-40B4-BE49-F238E27FC236}">
+                <a16:creationId xmlns:a16="http://schemas.microsoft.com/office/drawing/2014/main" id="{DFA3B949-4B12-8F16-1777-40B1C0665F1B}"/>
+              </a:ext>
+            </a:extLst>
+          </p:cNvPr>
+          <p:cNvSpPr txBox="1"/>
+          <p:nvPr/>
+        </p:nvSpPr>
+        <p:spPr>
+          <a:xfrm>
+            <a:off x="15494000" y="27330400"/>
+            <a:ext cx="14414500" cy="877163"/>
+          </a:xfrm>
+          <a:prstGeom prst="rect">
+            <a:avLst/>
+          </a:prstGeom>
+          <a:noFill/>
+        </p:spPr>
+        <p:txBody>
+          <a:bodyPr vert="horz" wrap="square" lIns="25400" tIns="0" rIns="25400" bIns="0" rtlCol="0">
+            <a:spAutoFit/>
+          </a:bodyPr>
+          <a:lstStyle/>
+          <a:p>
+            <a:r>
+              <a:rPr lang="en-US" sz="1900">
+                <a:solidFill>
+                  <a:srgbClr val="40464F"/>
+                </a:solidFill>
+                <a:latin typeface="Arial" panose="020B0604020202020204" pitchFamily="34" charset="0"/>
+              </a:rPr>
+              <a:t>The case study shows why the shared-state workflow matters. The same saved aircraft produces a coherent cruise solution, a usable twist distribution, a lightweight but not yet fully feasible structure, and a mission-level energy summary. The tool therefore surfaces coupled design consequences rather than isolated outputs.</a:t>
+            </a:r>
+          </a:p>
+        </p:txBody>
+      </p:sp>
+      <p:sp>
+        <p:nvSpPr>
+          <p:cNvPr id="50" name="Rectangle 49">
+            <a:extLst>
+              <a:ext uri="{FF2B5EF4-FFF2-40B4-BE49-F238E27FC236}">
+                <a16:creationId xmlns:a16="http://schemas.microsoft.com/office/drawing/2014/main" id="{834275E0-3868-D46F-BE6F-B17FF3672F05}"/>
+              </a:ext>
+            </a:extLst>
+          </p:cNvPr>
+          <p:cNvSpPr/>
+          <p:nvPr/>
+        </p:nvSpPr>
+        <p:spPr>
+          <a:xfrm>
+            <a:off x="30454600" y="3429000"/>
+            <a:ext cx="12903200" cy="762000"/>
+          </a:xfrm>
+          <a:prstGeom prst="rect">
+            <a:avLst/>
+          </a:prstGeom>
+          <a:solidFill>
+            <a:srgbClr val="044684"/>
+          </a:solidFill>
+          <a:ln w="25400" cap="flat" cmpd="sng" algn="ctr">
+            <a:noFill/>
+            <a:prstDash val="solid"/>
+          </a:ln>
+          <a:effectLst/>
+          <a:extLst>
+            <a:ext uri="{91240B29-F687-4F45-9708-019B960494DF}">
+              <a14:hiddenLine xmlns:a14="http://schemas.microsoft.com/office/drawing/2010/main" w="25400" cap="flat" cmpd="sng" algn="ctr">
+                <a:solidFill>
+                  <a:schemeClr val="accent1">
+                    <a:shade val="15000"/>
+                  </a:schemeClr>
+                </a:solidFill>
+                <a:prstDash val="solid"/>
+              </a14:hiddenLine>
+            </a:ext>
+          </a:extLst>
+        </p:spPr>
+        <p:style>
+          <a:lnRef idx="2">
+            <a:schemeClr val="accent1">
+              <a:shade val="15000"/>
+            </a:schemeClr>
+          </a:lnRef>
+          <a:fillRef idx="1">
+            <a:schemeClr val="accent1"/>
+          </a:fillRef>
+          <a:effectRef idx="0">
+            <a:schemeClr val="accent1"/>
+          </a:effectRef>
+          <a:fontRef idx="minor">
+            <a:schemeClr val="lt1"/>
+          </a:fontRef>
+        </p:style>
+        <p:txBody>
+          <a:bodyPr lIns="127000" tIns="88900" rIns="50800" bIns="25400" rtlCol="0" anchor="ctr"/>
+          <a:lstStyle/>
+          <a:p>
+            <a:r>
+              <a:rPr lang="en-US" sz="2900" b="1">
+                <a:solidFill>
+                  <a:srgbClr val="FFFFFF"/>
+                </a:solidFill>
+                <a:latin typeface="Arial" panose="020B0604020202020204" pitchFamily="34" charset="0"/>
+              </a:rPr>
+              <a:t>Validation: BARAM CFD Cross-Check</a:t>
+            </a:r>
+          </a:p>
+        </p:txBody>
+      </p:sp>
+      <p:pic>
+        <p:nvPicPr>
+          <p:cNvPr id="52" name="Picture 51">
+            <a:extLst>
+              <a:ext uri="{FF2B5EF4-FFF2-40B4-BE49-F238E27FC236}">
+                <a16:creationId xmlns:a16="http://schemas.microsoft.com/office/drawing/2014/main" id="{C5C3E152-8BC1-D685-85B8-7EEE6D9C4C30}"/>
+              </a:ext>
+            </a:extLst>
+          </p:cNvPr>
+          <p:cNvPicPr>
+            <a:picLocks/>
+          </p:cNvPicPr>
+          <p:nvPr/>
+        </p:nvPicPr>
+        <p:blipFill>
+          <a:blip r:embed="rId8" cstate="print">
+            <a:extLst>
+              <a:ext uri="{28A0092B-C50C-407E-A947-70E740481C1C}">
+                <a14:useLocalDpi xmlns:a14="http://schemas.microsoft.com/office/drawing/2010/main" val="0"/>
+              </a:ext>
+            </a:extLst>
+          </a:blip>
+          <a:stretch>
+            <a:fillRect/>
+          </a:stretch>
+        </p:blipFill>
+        <p:spPr>
+          <a:xfrm>
+            <a:off x="30454600" y="4267200"/>
+            <a:ext cx="6070600" cy="3421040"/>
+          </a:xfrm>
+          <a:prstGeom prst="rect">
+            <a:avLst/>
+          </a:prstGeom>
+        </p:spPr>
+      </p:pic>
+      <p:sp>
+        <p:nvSpPr>
+          <p:cNvPr id="53" name="TextBox 52">
+            <a:extLst>
+              <a:ext uri="{FF2B5EF4-FFF2-40B4-BE49-F238E27FC236}">
+                <a16:creationId xmlns:a16="http://schemas.microsoft.com/office/drawing/2014/main" id="{0544468E-7F47-30F4-E2A9-FECBF143B753}"/>
+              </a:ext>
+            </a:extLst>
+          </p:cNvPr>
+          <p:cNvSpPr txBox="1"/>
+          <p:nvPr/>
+        </p:nvSpPr>
+        <p:spPr>
+          <a:xfrm>
+            <a:off x="30454600" y="7721600"/>
+            <a:ext cx="6070600" cy="215444"/>
+          </a:xfrm>
+          <a:prstGeom prst="rect">
+            <a:avLst/>
+          </a:prstGeom>
+          <a:noFill/>
+        </p:spPr>
+        <p:txBody>
+          <a:bodyPr vert="horz" wrap="square" lIns="0" tIns="0" rIns="0" bIns="0" rtlCol="0">
+            <a:spAutoFit/>
+          </a:bodyPr>
+          <a:lstStyle/>
+          <a:p>
+            <a:r>
+              <a:rPr lang="en-US" sz="1400">
+                <a:solidFill>
+                  <a:srgbClr val="40464F"/>
+                </a:solidFill>
+                <a:latin typeface="Arial" panose="020B0604020202020204" pitchFamily="34" charset="0"/>
+              </a:rPr>
+              <a:t>Separated coefficient comparison for C_L and C_D.</a:t>
+            </a:r>
+          </a:p>
+        </p:txBody>
+      </p:sp>
+      <p:pic>
+        <p:nvPicPr>
+          <p:cNvPr id="55" name="Picture 54">
+            <a:extLst>
+              <a:ext uri="{FF2B5EF4-FFF2-40B4-BE49-F238E27FC236}">
+                <a16:creationId xmlns:a16="http://schemas.microsoft.com/office/drawing/2014/main" id="{9098A523-5DB6-BBD5-7D2F-485E70457A33}"/>
+              </a:ext>
+            </a:extLst>
+          </p:cNvPr>
+          <p:cNvPicPr>
+            <a:picLocks/>
+          </p:cNvPicPr>
+          <p:nvPr/>
+        </p:nvPicPr>
+        <p:blipFill>
+          <a:blip r:embed="rId9" cstate="print">
+            <a:extLst>
+              <a:ext uri="{28A0092B-C50C-407E-A947-70E740481C1C}">
+                <a14:useLocalDpi xmlns:a14="http://schemas.microsoft.com/office/drawing/2010/main" val="0"/>
+              </a:ext>
+            </a:extLst>
+          </a:blip>
+          <a:stretch>
+            <a:fillRect/>
+          </a:stretch>
+        </p:blipFill>
+        <p:spPr>
+          <a:xfrm>
+            <a:off x="36906200" y="4267200"/>
+            <a:ext cx="6070600" cy="3642360"/>
+          </a:xfrm>
+          <a:prstGeom prst="rect">
+            <a:avLst/>
+          </a:prstGeom>
+        </p:spPr>
+      </p:pic>
+      <p:sp>
+        <p:nvSpPr>
+          <p:cNvPr id="56" name="TextBox 55">
+            <a:extLst>
+              <a:ext uri="{FF2B5EF4-FFF2-40B4-BE49-F238E27FC236}">
+                <a16:creationId xmlns:a16="http://schemas.microsoft.com/office/drawing/2014/main" id="{BDB8AF91-17BC-4BA2-22CF-5828D6AA9957}"/>
+              </a:ext>
+            </a:extLst>
+          </p:cNvPr>
+          <p:cNvSpPr txBox="1"/>
+          <p:nvPr/>
+        </p:nvSpPr>
+        <p:spPr>
+          <a:xfrm>
+            <a:off x="36906200" y="7950200"/>
+            <a:ext cx="6070600" cy="215444"/>
+          </a:xfrm>
+          <a:prstGeom prst="rect">
+            <a:avLst/>
+          </a:prstGeom>
+          <a:noFill/>
+        </p:spPr>
+        <p:txBody>
+          <a:bodyPr vert="horz" wrap="square" lIns="0" tIns="0" rIns="0" bIns="0" rtlCol="0">
+            <a:spAutoFit/>
+          </a:bodyPr>
+          <a:lstStyle/>
+          <a:p>
+            <a:r>
+              <a:rPr lang="en-US" sz="1400">
+                <a:solidFill>
+                  <a:srgbClr val="40464F"/>
+                </a:solidFill>
+                <a:latin typeface="Arial" panose="020B0604020202020204" pitchFamily="34" charset="0"/>
+              </a:rPr>
+              <a:t>Projected planform share versus split-patch drag share.</a:t>
+            </a:r>
+          </a:p>
+        </p:txBody>
+      </p:sp>
+      <p:pic>
+        <p:nvPicPr>
+          <p:cNvPr id="58" name="Picture 57">
+            <a:extLst>
+              <a:ext uri="{FF2B5EF4-FFF2-40B4-BE49-F238E27FC236}">
+                <a16:creationId xmlns:a16="http://schemas.microsoft.com/office/drawing/2014/main" id="{A1896A6C-84F9-F36C-13F8-6E8D79BC2047}"/>
+              </a:ext>
+            </a:extLst>
+          </p:cNvPr>
+          <p:cNvPicPr>
+            <a:picLocks/>
+          </p:cNvPicPr>
+          <p:nvPr/>
+        </p:nvPicPr>
+        <p:blipFill>
+          <a:blip r:embed="rId10">
+            <a:extLst>
+              <a:ext uri="{28A0092B-C50C-407E-A947-70E740481C1C}">
+                <a14:useLocalDpi xmlns:a14="http://schemas.microsoft.com/office/drawing/2010/main" val="0"/>
+              </a:ext>
+            </a:extLst>
+          </a:blip>
+          <a:stretch>
+            <a:fillRect/>
+          </a:stretch>
+        </p:blipFill>
+        <p:spPr>
+          <a:xfrm>
+            <a:off x="31978600" y="8356600"/>
+            <a:ext cx="9652000" cy="5439310"/>
+          </a:xfrm>
+          <a:prstGeom prst="rect">
+            <a:avLst/>
+          </a:prstGeom>
+        </p:spPr>
+      </p:pic>
+      <p:sp>
+        <p:nvSpPr>
+          <p:cNvPr id="59" name="TextBox 58">
+            <a:extLst>
+              <a:ext uri="{FF2B5EF4-FFF2-40B4-BE49-F238E27FC236}">
+                <a16:creationId xmlns:a16="http://schemas.microsoft.com/office/drawing/2014/main" id="{71409BAB-0CA5-DD6A-DB61-B9CC1E760043}"/>
+              </a:ext>
+            </a:extLst>
+          </p:cNvPr>
+          <p:cNvSpPr txBox="1"/>
+          <p:nvPr/>
+        </p:nvSpPr>
+        <p:spPr>
+          <a:xfrm>
+            <a:off x="30454600" y="13893800"/>
+            <a:ext cx="12903200" cy="215444"/>
+          </a:xfrm>
+          <a:prstGeom prst="rect">
+            <a:avLst/>
+          </a:prstGeom>
+          <a:noFill/>
+        </p:spPr>
+        <p:txBody>
+          <a:bodyPr vert="horz" wrap="square" lIns="0" tIns="0" rIns="0" bIns="0" rtlCol="0">
+            <a:spAutoFit/>
+          </a:bodyPr>
+          <a:lstStyle/>
+          <a:p>
+            <a:r>
+              <a:rPr lang="en-US" sz="1400">
+                <a:solidFill>
+                  <a:srgbClr val="40464F"/>
+                </a:solidFill>
+                <a:latin typeface="Arial" panose="020B0604020202020204" pitchFamily="34" charset="0"/>
+              </a:rPr>
+              <a:t>Separated L over D comparison so the coefficient bars are not visually compressed.</a:t>
+            </a:r>
+          </a:p>
+        </p:txBody>
+      </p:sp>
+      <p:sp>
+        <p:nvSpPr>
+          <p:cNvPr id="60" name="TextBox 59">
+            <a:extLst>
+              <a:ext uri="{FF2B5EF4-FFF2-40B4-BE49-F238E27FC236}">
+                <a16:creationId xmlns:a16="http://schemas.microsoft.com/office/drawing/2014/main" id="{D2C533CD-C2A1-FECC-B2A4-BF9EF6625DAB}"/>
+              </a:ext>
+            </a:extLst>
+          </p:cNvPr>
+          <p:cNvSpPr txBox="1"/>
+          <p:nvPr/>
+        </p:nvSpPr>
+        <p:spPr>
+          <a:xfrm>
+            <a:off x="30454600" y="14325600"/>
+            <a:ext cx="12903200" cy="1777410"/>
+          </a:xfrm>
+          <a:prstGeom prst="rect">
+            <a:avLst/>
+          </a:prstGeom>
+          <a:noFill/>
+        </p:spPr>
+        <p:txBody>
+          <a:bodyPr vert="horz" wrap="square" lIns="25400" tIns="0" rIns="25400" bIns="0" rtlCol="0">
+            <a:spAutoFit/>
+          </a:bodyPr>
+          <a:lstStyle/>
+          <a:p>
+            <a:pPr marL="342900" indent="-342900">
+              <a:buFont typeface="+mj-lt"/>
+              <a:buChar char="•"/>
+            </a:pPr>
+            <a:r>
+              <a:rPr lang="en-US" sz="1650">
+                <a:solidFill>
+                  <a:srgbClr val="40464F"/>
+                </a:solidFill>
+                <a:latin typeface="Arial" panose="020B0604020202020204" pitchFamily="34" charset="0"/>
+              </a:rPr>
+              <a:t>Independent CFD path: incompressible RANS, standard k-epsilon, symmetry half-model, convergence after 604 SIMPLE iterations.</a:t>
+            </a:r>
+          </a:p>
+          <a:p>
+            <a:pPr marL="342900" indent="-342900">
+              <a:buFont typeface="+mj-lt"/>
+              <a:buChar char="•"/>
+            </a:pPr>
+            <a:r>
+              <a:rPr lang="en-US" sz="1650">
+                <a:solidFill>
+                  <a:srgbClr val="40464F"/>
+                </a:solidFill>
+                <a:latin typeface="Arial" panose="020B0604020202020204" pitchFamily="34" charset="0"/>
+              </a:rPr>
+              <a:t>After rescaling to the thesis reference quantities, lift is directionally close: C_L = 0.273 in BARAM versus 0.300 in the repository cruise analysis.</a:t>
+            </a:r>
+          </a:p>
+          <a:p>
+            <a:pPr marL="342900" indent="-342900">
+              <a:buFont typeface="+mj-lt"/>
+              <a:buChar char="•"/>
+            </a:pPr>
+            <a:r>
+              <a:rPr lang="en-US" sz="1650">
+                <a:solidFill>
+                  <a:srgbClr val="40464F"/>
+                </a:solidFill>
+                <a:latin typeface="Arial" panose="020B0604020202020204" pitchFamily="34" charset="0"/>
+              </a:rPr>
+              <a:t>Drag differs materially: C_D = 0.0341 in BARAM versus 0.0129 in the repository cruise analysis, reducing L over D from 23.21 to 8.00.</a:t>
+            </a:r>
+          </a:p>
+          <a:p>
+            <a:pPr marL="342900" indent="-342900">
+              <a:buFont typeface="+mj-lt"/>
+              <a:buChar char="•"/>
+            </a:pPr>
+            <a:r>
+              <a:rPr lang="en-US" sz="1650">
+                <a:solidFill>
+                  <a:srgbClr val="40464F"/>
+                </a:solidFill>
+                <a:latin typeface="Arial" panose="020B0604020202020204" pitchFamily="34" charset="0"/>
+              </a:rPr>
+              <a:t>The CFD drag is pressure dominated: 77.2 percent pressure drag and 22.8 percent viscous drag.</a:t>
+            </a:r>
+          </a:p>
+          <a:p>
+            <a:pPr marL="342900" indent="-342900">
+              <a:buFont typeface="+mj-lt"/>
+              <a:buChar char="•"/>
+            </a:pPr>
+            <a:r>
+              <a:rPr lang="en-US" sz="1650">
+                <a:solidFill>
+                  <a:srgbClr val="40464F"/>
+                </a:solidFill>
+                <a:latin typeface="Arial" panose="020B0604020202020204" pitchFamily="34" charset="0"/>
+              </a:rPr>
+              <a:t>The centerbody plus junction occupy only 32.2 percent of projected planform area but account for 94.3 percent of the drag share, indicating a centerbody-dominated pressure-drag mechanism.</a:t>
+            </a:r>
+          </a:p>
+        </p:txBody>
+      </p:sp>
+      <p:sp>
+        <p:nvSpPr>
+          <p:cNvPr id="61" name="Rectangle 60">
+            <a:extLst>
+              <a:ext uri="{FF2B5EF4-FFF2-40B4-BE49-F238E27FC236}">
+                <a16:creationId xmlns:a16="http://schemas.microsoft.com/office/drawing/2014/main" id="{632C68B1-9361-BC64-3379-2340BDB18CC8}"/>
+              </a:ext>
+            </a:extLst>
+          </p:cNvPr>
+          <p:cNvSpPr/>
+          <p:nvPr/>
+        </p:nvSpPr>
+        <p:spPr>
+          <a:xfrm>
+            <a:off x="30454600" y="17754600"/>
+            <a:ext cx="12903200" cy="762000"/>
+          </a:xfrm>
+          <a:prstGeom prst="rect">
+            <a:avLst/>
+          </a:prstGeom>
+          <a:solidFill>
+            <a:srgbClr val="044684"/>
+          </a:solidFill>
+          <a:ln w="25400" cap="flat" cmpd="sng" algn="ctr">
+            <a:noFill/>
+            <a:prstDash val="solid"/>
+          </a:ln>
+          <a:effectLst/>
+          <a:extLst>
+            <a:ext uri="{91240B29-F687-4F45-9708-019B960494DF}">
+              <a14:hiddenLine xmlns:a14="http://schemas.microsoft.com/office/drawing/2010/main" w="25400" cap="flat" cmpd="sng" algn="ctr">
+                <a:solidFill>
+                  <a:schemeClr val="accent1">
+                    <a:shade val="15000"/>
+                  </a:schemeClr>
+                </a:solidFill>
+                <a:prstDash val="solid"/>
+              </a14:hiddenLine>
+            </a:ext>
+          </a:extLst>
+        </p:spPr>
+        <p:style>
+          <a:lnRef idx="2">
+            <a:schemeClr val="accent1">
+              <a:shade val="15000"/>
+            </a:schemeClr>
+          </a:lnRef>
+          <a:fillRef idx="1">
+            <a:schemeClr val="accent1"/>
+          </a:fillRef>
+          <a:effectRef idx="0">
+            <a:schemeClr val="accent1"/>
+          </a:effectRef>
+          <a:fontRef idx="minor">
+            <a:schemeClr val="lt1"/>
+          </a:fontRef>
+        </p:style>
+        <p:txBody>
+          <a:bodyPr lIns="127000" tIns="88900" rIns="50800" bIns="25400" rtlCol="0" anchor="ctr"/>
+          <a:lstStyle/>
+          <a:p>
+            <a:r>
+              <a:rPr lang="en-US" sz="2900" b="1">
+                <a:solidFill>
+                  <a:srgbClr val="FFFFFF"/>
+                </a:solidFill>
+                <a:latin typeface="Arial" panose="020B0604020202020204" pitchFamily="34" charset="0"/>
+              </a:rPr>
+              <a:t>Mesh-Sensitivity Study</a:t>
+            </a:r>
+          </a:p>
+        </p:txBody>
+      </p:sp>
+      <p:graphicFrame>
+        <p:nvGraphicFramePr>
+          <p:cNvPr id="62" name="Table 61">
+            <a:extLst>
+              <a:ext uri="{FF2B5EF4-FFF2-40B4-BE49-F238E27FC236}">
+                <a16:creationId xmlns:a16="http://schemas.microsoft.com/office/drawing/2014/main" id="{B47D726E-3296-216E-054D-1EA146E6A9F3}"/>
+              </a:ext>
+            </a:extLst>
+          </p:cNvPr>
+          <p:cNvGraphicFramePr>
+            <a:graphicFrameLocks noGrp="1"/>
+          </p:cNvGraphicFramePr>
+          <p:nvPr>
+            <p:extLst>
+              <p:ext uri="{D42A27DB-BD31-4B8C-83A1-F6EECF244321}">
+                <p14:modId xmlns:p14="http://schemas.microsoft.com/office/powerpoint/2010/main" val="2862939423"/>
+              </p:ext>
+            </p:extLst>
+          </p:nvPr>
+        </p:nvGraphicFramePr>
+        <p:xfrm>
+          <a:off x="30454600" y="18592800"/>
+          <a:ext cx="12903200" cy="1828800"/>
+        </p:xfrm>
+        <a:graphic>
+          <a:graphicData uri="http://schemas.openxmlformats.org/drawingml/2006/table">
+            <a:tbl>
+              <a:tblPr firstRow="1" bandRow="1">
+                <a:tableStyleId>{5C22544A-7EE6-4342-B048-85BDC9FD1C3A}</a:tableStyleId>
+              </a:tblPr>
+              <a:tblGrid>
+                <a:gridCol w="1600200">
+                  <a:extLst>
+                    <a:ext uri="{9D8B030D-6E8A-4147-A177-3AD203B41FA5}">
+                      <a16:colId xmlns:a16="http://schemas.microsoft.com/office/drawing/2014/main" val="1118119891"/>
+                    </a:ext>
+                  </a:extLst>
+                </a:gridCol>
+                <a:gridCol w="6667500">
+                  <a:extLst>
+                    <a:ext uri="{9D8B030D-6E8A-4147-A177-3AD203B41FA5}">
+                      <a16:colId xmlns:a16="http://schemas.microsoft.com/office/drawing/2014/main" val="646144778"/>
+                    </a:ext>
+                  </a:extLst>
+                </a:gridCol>
+                <a:gridCol w="1397000">
+                  <a:extLst>
+                    <a:ext uri="{9D8B030D-6E8A-4147-A177-3AD203B41FA5}">
+                      <a16:colId xmlns:a16="http://schemas.microsoft.com/office/drawing/2014/main" val="1257242267"/>
+                    </a:ext>
+                  </a:extLst>
+                </a:gridCol>
+                <a:gridCol w="1397000">
+                  <a:extLst>
+                    <a:ext uri="{9D8B030D-6E8A-4147-A177-3AD203B41FA5}">
+                      <a16:colId xmlns:a16="http://schemas.microsoft.com/office/drawing/2014/main" val="1722515686"/>
+                    </a:ext>
+                  </a:extLst>
+                </a:gridCol>
+                <a:gridCol w="1841500">
+                  <a:extLst>
+                    <a:ext uri="{9D8B030D-6E8A-4147-A177-3AD203B41FA5}">
+                      <a16:colId xmlns:a16="http://schemas.microsoft.com/office/drawing/2014/main" val="133966778"/>
+                    </a:ext>
+                  </a:extLst>
+                </a:gridCol>
+              </a:tblGrid>
+              <a:tr h="609600">
+                <a:tc>
+                  <a:txBody>
+                    <a:bodyPr/>
+                    <a:lstStyle/>
+                    <a:p>
+                      <a:pPr algn="l">
+                        <a:spcBef>
+                          <a:spcPts val="0"/>
+                        </a:spcBef>
+                        <a:spcAft>
+                          <a:spcPts val="0"/>
+                        </a:spcAft>
+                      </a:pPr>
+                      <a:r>
+                        <a:rPr lang="en-US" sz="1500" b="1" i="0">
+                          <a:solidFill>
+                            <a:srgbClr val="FFFFFF"/>
+                          </a:solidFill>
+                          <a:latin typeface="Arial" panose="020B0604020202020204" pitchFamily="34" charset="0"/>
+                        </a:rPr>
+                        <a:t>Condition</a:t>
+                      </a:r>
+                    </a:p>
+                  </a:txBody>
+                  <a:tcPr marL="50800" marR="50800" marT="25400" marB="12700">
+                    <a:solidFill>
+                      <a:srgbClr val="044684"/>
+                    </a:solidFill>
+                  </a:tcPr>
+                </a:tc>
+                <a:tc>
+                  <a:txBody>
+                    <a:bodyPr/>
+                    <a:lstStyle/>
+                    <a:p>
+                      <a:pPr algn="l">
+                        <a:spcBef>
+                          <a:spcPts val="0"/>
+                        </a:spcBef>
+                        <a:spcAft>
+                          <a:spcPts val="0"/>
+                        </a:spcAft>
+                      </a:pPr>
+                      <a:r>
+                        <a:rPr lang="en-US" sz="1500" b="1" i="0">
+                          <a:solidFill>
+                            <a:srgbClr val="FFFFFF"/>
+                          </a:solidFill>
+                          <a:latin typeface="Arial" panose="020B0604020202020204" pitchFamily="34" charset="0"/>
+                        </a:rPr>
+                        <a:t>Cells</a:t>
+                      </a:r>
+                    </a:p>
+                  </a:txBody>
+                  <a:tcPr marL="50800" marR="50800" marT="25400" marB="12700">
+                    <a:solidFill>
+                      <a:srgbClr val="044684"/>
+                    </a:solidFill>
+                  </a:tcPr>
+                </a:tc>
+                <a:tc>
+                  <a:txBody>
+                    <a:bodyPr/>
+                    <a:lstStyle/>
+                    <a:p>
+                      <a:pPr algn="l">
+                        <a:spcBef>
+                          <a:spcPts val="0"/>
+                        </a:spcBef>
+                        <a:spcAft>
+                          <a:spcPts val="0"/>
+                        </a:spcAft>
+                      </a:pPr>
+                      <a:r>
+                        <a:rPr lang="en-US" sz="1500" b="1" i="0">
+                          <a:solidFill>
+                            <a:srgbClr val="FFFFFF"/>
+                          </a:solidFill>
+                          <a:latin typeface="Arial" panose="020B0604020202020204" pitchFamily="34" charset="0"/>
+                        </a:rPr>
+                        <a:t>dC_D</a:t>
+                      </a:r>
+                    </a:p>
+                  </a:txBody>
+                  <a:tcPr marL="50800" marR="50800" marT="25400" marB="12700">
+                    <a:solidFill>
+                      <a:srgbClr val="044684"/>
+                    </a:solidFill>
+                  </a:tcPr>
+                </a:tc>
+                <a:tc>
+                  <a:txBody>
+                    <a:bodyPr/>
+                    <a:lstStyle/>
+                    <a:p>
+                      <a:pPr algn="l">
+                        <a:spcBef>
+                          <a:spcPts val="0"/>
+                        </a:spcBef>
+                        <a:spcAft>
+                          <a:spcPts val="0"/>
+                        </a:spcAft>
+                      </a:pPr>
+                      <a:r>
+                        <a:rPr lang="en-US" sz="1500" b="1" i="0">
+                          <a:solidFill>
+                            <a:srgbClr val="FFFFFF"/>
+                          </a:solidFill>
+                          <a:latin typeface="Arial" panose="020B0604020202020204" pitchFamily="34" charset="0"/>
+                        </a:rPr>
+                        <a:t>dC_L</a:t>
+                      </a:r>
+                    </a:p>
+                  </a:txBody>
+                  <a:tcPr marL="50800" marR="50800" marT="25400" marB="12700">
+                    <a:solidFill>
+                      <a:srgbClr val="044684"/>
+                    </a:solidFill>
+                  </a:tcPr>
+                </a:tc>
+                <a:tc>
+                  <a:txBody>
+                    <a:bodyPr/>
+                    <a:lstStyle/>
+                    <a:p>
+                      <a:pPr algn="l">
+                        <a:spcBef>
+                          <a:spcPts val="0"/>
+                        </a:spcBef>
+                        <a:spcAft>
+                          <a:spcPts val="0"/>
+                        </a:spcAft>
+                      </a:pPr>
+                      <a:r>
+                        <a:rPr lang="en-US" sz="1500" b="1" i="0">
+                          <a:solidFill>
+                            <a:srgbClr val="FFFFFF"/>
+                          </a:solidFill>
+                          <a:latin typeface="Arial" panose="020B0604020202020204" pitchFamily="34" charset="0"/>
+                        </a:rPr>
+                        <a:t>Read</a:t>
+                      </a:r>
+                    </a:p>
+                  </a:txBody>
+                  <a:tcPr marL="50800" marR="50800" marT="25400" marB="12700">
+                    <a:solidFill>
+                      <a:srgbClr val="044684"/>
+                    </a:solidFill>
+                  </a:tcPr>
+                </a:tc>
+                <a:extLst>
+                  <a:ext uri="{0D108BD9-81ED-4DB2-BD59-A6C34878D82A}">
+                    <a16:rowId xmlns:a16="http://schemas.microsoft.com/office/drawing/2014/main" val="3595313669"/>
+                  </a:ext>
+                </a:extLst>
+              </a:tr>
+              <a:tr h="609600">
+                <a:tc>
+                  <a:txBody>
+                    <a:bodyPr/>
+                    <a:lstStyle/>
+                    <a:p>
+                      <a:pPr algn="l">
+                        <a:spcBef>
+                          <a:spcPts val="0"/>
+                        </a:spcBef>
+                        <a:spcAft>
+                          <a:spcPts val="0"/>
+                        </a:spcAft>
+                      </a:pPr>
+                      <a:r>
+                        <a:rPr lang="en-US" sz="1500" b="0" i="0">
+                          <a:solidFill>
+                            <a:srgbClr val="40464F"/>
+                          </a:solidFill>
+                          <a:latin typeface="Arial" panose="020B0604020202020204" pitchFamily="34" charset="0"/>
+                        </a:rPr>
+                        <a:t>Cruise</a:t>
+                      </a:r>
+                    </a:p>
+                  </a:txBody>
+                  <a:tcPr marL="50800" marR="50800" marT="25400" marB="12700"/>
+                </a:tc>
+                <a:tc>
+                  <a:txBody>
+                    <a:bodyPr/>
+                    <a:lstStyle/>
+                    <a:p>
+                      <a:pPr algn="l">
+                        <a:spcBef>
+                          <a:spcPts val="0"/>
+                        </a:spcBef>
+                        <a:spcAft>
+                          <a:spcPts val="0"/>
+                        </a:spcAft>
+                      </a:pPr>
+                      <a:r>
+                        <a:rPr lang="en-US" sz="1500" b="0" i="0">
+                          <a:solidFill>
+                            <a:srgbClr val="40464F"/>
+                          </a:solidFill>
+                          <a:latin typeface="Arial" panose="020B0604020202020204" pitchFamily="34" charset="0"/>
+                        </a:rPr>
+                        <a:t>0.423M -&gt; 2.159M -&gt; 2.773M -&gt; 8.505M</a:t>
+                      </a:r>
+                    </a:p>
+                  </a:txBody>
+                  <a:tcPr marL="50800" marR="50800" marT="25400" marB="12700"/>
+                </a:tc>
+                <a:tc>
+                  <a:txBody>
+                    <a:bodyPr/>
+                    <a:lstStyle/>
+                    <a:p>
+                      <a:pPr algn="l">
+                        <a:spcBef>
+                          <a:spcPts val="0"/>
+                        </a:spcBef>
+                        <a:spcAft>
+                          <a:spcPts val="0"/>
+                        </a:spcAft>
+                      </a:pPr>
+                      <a:r>
+                        <a:rPr lang="en-US" sz="1500" b="0" i="0">
+                          <a:solidFill>
+                            <a:srgbClr val="40464F"/>
+                          </a:solidFill>
+                          <a:latin typeface="Arial" panose="020B0604020202020204" pitchFamily="34" charset="0"/>
+                        </a:rPr>
+                        <a:t>2.02%</a:t>
+                      </a:r>
+                    </a:p>
+                  </a:txBody>
+                  <a:tcPr marL="50800" marR="50800" marT="25400" marB="12700"/>
+                </a:tc>
+                <a:tc>
+                  <a:txBody>
+                    <a:bodyPr/>
+                    <a:lstStyle/>
+                    <a:p>
+                      <a:pPr algn="l">
+                        <a:spcBef>
+                          <a:spcPts val="0"/>
+                        </a:spcBef>
+                        <a:spcAft>
+                          <a:spcPts val="0"/>
+                        </a:spcAft>
+                      </a:pPr>
+                      <a:r>
+                        <a:rPr lang="en-US" sz="1500" b="0" i="0">
+                          <a:solidFill>
+                            <a:srgbClr val="40464F"/>
+                          </a:solidFill>
+                          <a:latin typeface="Arial" panose="020B0604020202020204" pitchFamily="34" charset="0"/>
+                        </a:rPr>
+                        <a:t>0.57%</a:t>
+                      </a:r>
+                    </a:p>
+                  </a:txBody>
+                  <a:tcPr marL="50800" marR="50800" marT="25400" marB="12700"/>
+                </a:tc>
+                <a:tc>
+                  <a:txBody>
+                    <a:bodyPr/>
+                    <a:lstStyle/>
+                    <a:p>
+                      <a:pPr algn="l">
+                        <a:spcBef>
+                          <a:spcPts val="0"/>
+                        </a:spcBef>
+                        <a:spcAft>
+                          <a:spcPts val="0"/>
+                        </a:spcAft>
+                      </a:pPr>
+                      <a:r>
+                        <a:rPr lang="en-US" sz="1500" b="0" i="0">
+                          <a:solidFill>
+                            <a:srgbClr val="40464F"/>
+                          </a:solidFill>
+                          <a:latin typeface="Arial" panose="020B0604020202020204" pitchFamily="34" charset="0"/>
+                        </a:rPr>
+                        <a:t>Mixed</a:t>
+                      </a:r>
+                    </a:p>
+                  </a:txBody>
+                  <a:tcPr marL="50800" marR="50800" marT="25400" marB="12700"/>
+                </a:tc>
+                <a:extLst>
+                  <a:ext uri="{0D108BD9-81ED-4DB2-BD59-A6C34878D82A}">
+                    <a16:rowId xmlns:a16="http://schemas.microsoft.com/office/drawing/2014/main" val="437510398"/>
+                  </a:ext>
+                </a:extLst>
+              </a:tr>
+              <a:tr h="609600">
+                <a:tc>
+                  <a:txBody>
+                    <a:bodyPr/>
+                    <a:lstStyle/>
+                    <a:p>
+                      <a:pPr algn="l">
+                        <a:spcBef>
+                          <a:spcPts val="0"/>
+                        </a:spcBef>
+                        <a:spcAft>
+                          <a:spcPts val="0"/>
+                        </a:spcAft>
+                      </a:pPr>
+                      <a:r>
+                        <a:rPr lang="en-US" sz="1500" b="0" i="0">
+                          <a:solidFill>
+                            <a:srgbClr val="40464F"/>
+                          </a:solidFill>
+                          <a:latin typeface="Arial" panose="020B0604020202020204" pitchFamily="34" charset="0"/>
+                        </a:rPr>
+                        <a:t>Takeoff</a:t>
+                      </a:r>
+                    </a:p>
+                  </a:txBody>
+                  <a:tcPr marL="50800" marR="50800" marT="25400" marB="12700"/>
+                </a:tc>
+                <a:tc>
+                  <a:txBody>
+                    <a:bodyPr/>
+                    <a:lstStyle/>
+                    <a:p>
+                      <a:pPr algn="l">
+                        <a:spcBef>
+                          <a:spcPts val="0"/>
+                        </a:spcBef>
+                        <a:spcAft>
+                          <a:spcPts val="0"/>
+                        </a:spcAft>
+                      </a:pPr>
+                      <a:r>
+                        <a:rPr lang="en-US" sz="1500" b="0" i="0">
+                          <a:solidFill>
+                            <a:srgbClr val="40464F"/>
+                          </a:solidFill>
+                          <a:latin typeface="Arial" panose="020B0604020202020204" pitchFamily="34" charset="0"/>
+                        </a:rPr>
+                        <a:t>0.423M -&gt; 2.159M -&gt; 2.773M -&gt; 33.901M</a:t>
+                      </a:r>
+                    </a:p>
+                  </a:txBody>
+                  <a:tcPr marL="50800" marR="50800" marT="25400" marB="12700"/>
+                </a:tc>
+                <a:tc>
+                  <a:txBody>
+                    <a:bodyPr/>
+                    <a:lstStyle/>
+                    <a:p>
+                      <a:pPr algn="l">
+                        <a:spcBef>
+                          <a:spcPts val="0"/>
+                        </a:spcBef>
+                        <a:spcAft>
+                          <a:spcPts val="0"/>
+                        </a:spcAft>
+                      </a:pPr>
+                      <a:r>
+                        <a:rPr lang="en-US" sz="1500" b="0" i="0">
+                          <a:solidFill>
+                            <a:srgbClr val="40464F"/>
+                          </a:solidFill>
+                          <a:latin typeface="Arial" panose="020B0604020202020204" pitchFamily="34" charset="0"/>
+                        </a:rPr>
+                        <a:t>3.13%</a:t>
+                      </a:r>
+                    </a:p>
+                  </a:txBody>
+                  <a:tcPr marL="50800" marR="50800" marT="25400" marB="12700"/>
+                </a:tc>
+                <a:tc>
+                  <a:txBody>
+                    <a:bodyPr/>
+                    <a:lstStyle/>
+                    <a:p>
+                      <a:pPr algn="l">
+                        <a:spcBef>
+                          <a:spcPts val="0"/>
+                        </a:spcBef>
+                        <a:spcAft>
+                          <a:spcPts val="0"/>
+                        </a:spcAft>
+                      </a:pPr>
+                      <a:r>
+                        <a:rPr lang="en-US" sz="1500" b="0" i="0">
+                          <a:solidFill>
+                            <a:srgbClr val="40464F"/>
+                          </a:solidFill>
+                          <a:latin typeface="Arial" panose="020B0604020202020204" pitchFamily="34" charset="0"/>
+                        </a:rPr>
+                        <a:t>0.58%</a:t>
+                      </a:r>
+                    </a:p>
+                  </a:txBody>
+                  <a:tcPr marL="50800" marR="50800" marT="25400" marB="12700"/>
+                </a:tc>
+                <a:tc>
+                  <a:txBody>
+                    <a:bodyPr/>
+                    <a:lstStyle/>
+                    <a:p>
+                      <a:pPr algn="l">
+                        <a:spcBef>
+                          <a:spcPts val="0"/>
+                        </a:spcBef>
+                        <a:spcAft>
+                          <a:spcPts val="0"/>
+                        </a:spcAft>
+                      </a:pPr>
+                      <a:r>
+                        <a:rPr lang="en-US" sz="1500" b="0" i="0">
+                          <a:solidFill>
+                            <a:srgbClr val="40464F"/>
+                          </a:solidFill>
+                          <a:latin typeface="Arial" panose="020B0604020202020204" pitchFamily="34" charset="0"/>
+                        </a:rPr>
+                        <a:t>Sensitive</a:t>
+                      </a:r>
+                    </a:p>
+                  </a:txBody>
+                  <a:tcPr marL="50800" marR="50800" marT="25400" marB="12700"/>
+                </a:tc>
+                <a:extLst>
+                  <a:ext uri="{0D108BD9-81ED-4DB2-BD59-A6C34878D82A}">
+                    <a16:rowId xmlns:a16="http://schemas.microsoft.com/office/drawing/2014/main" val="4093364297"/>
+                  </a:ext>
+                </a:extLst>
+              </a:tr>
+            </a:tbl>
+          </a:graphicData>
+        </a:graphic>
+      </p:graphicFrame>
+      <p:sp>
+        <p:nvSpPr>
+          <p:cNvPr id="63" name="TextBox 62">
+            <a:extLst>
+              <a:ext uri="{FF2B5EF4-FFF2-40B4-BE49-F238E27FC236}">
+                <a16:creationId xmlns:a16="http://schemas.microsoft.com/office/drawing/2014/main" id="{64704DAE-268D-FA5D-D965-9705A2869EF8}"/>
+              </a:ext>
+            </a:extLst>
+          </p:cNvPr>
+          <p:cNvSpPr txBox="1"/>
+          <p:nvPr/>
+        </p:nvSpPr>
+        <p:spPr>
+          <a:xfrm>
+            <a:off x="41478200" y="19507200"/>
+            <a:ext cx="1574800" cy="230832"/>
+          </a:xfrm>
+          <a:prstGeom prst="rect">
+            <a:avLst/>
+          </a:prstGeom>
+          <a:noFill/>
+        </p:spPr>
+        <p:txBody>
+          <a:bodyPr vert="horz" wrap="square" lIns="25400" tIns="0" rIns="25400" bIns="0" rtlCol="0">
+            <a:spAutoFit/>
+          </a:bodyPr>
+          <a:lstStyle/>
+          <a:p>
+            <a:r>
+              <a:rPr lang="en-US" sz="1500">
+                <a:solidFill>
+                  <a:srgbClr val="B23A48"/>
+                </a:solidFill>
+                <a:latin typeface="Arial" panose="020B0604020202020204" pitchFamily="34" charset="0"/>
+              </a:rPr>
+              <a:t>Sensitive</a:t>
+            </a:r>
+          </a:p>
+        </p:txBody>
+      </p:sp>
+      <p:sp>
+        <p:nvSpPr>
+          <p:cNvPr id="64" name="TextBox 63">
+            <a:extLst>
+              <a:ext uri="{FF2B5EF4-FFF2-40B4-BE49-F238E27FC236}">
+                <a16:creationId xmlns:a16="http://schemas.microsoft.com/office/drawing/2014/main" id="{CA640DC5-C254-AF92-C3AD-E34E66FDB0F4}"/>
+              </a:ext>
+            </a:extLst>
+          </p:cNvPr>
+          <p:cNvSpPr txBox="1"/>
+          <p:nvPr/>
+        </p:nvSpPr>
+        <p:spPr>
+          <a:xfrm>
+            <a:off x="30454600" y="21107400"/>
+            <a:ext cx="12903200" cy="1384995"/>
+          </a:xfrm>
+          <a:prstGeom prst="rect">
+            <a:avLst/>
+          </a:prstGeom>
+          <a:noFill/>
+        </p:spPr>
+        <p:txBody>
+          <a:bodyPr vert="horz" wrap="square" lIns="25400" tIns="0" rIns="25400" bIns="0" rtlCol="0">
+            <a:spAutoFit/>
+          </a:bodyPr>
+          <a:lstStyle/>
+          <a:p>
+            <a:pPr marL="342900" indent="-342900">
+              <a:buFont typeface="+mj-lt"/>
+              <a:buChar char="•"/>
+            </a:pPr>
+            <a:r>
+              <a:rPr lang="en-US" sz="1500">
+                <a:solidFill>
+                  <a:srgbClr val="40464F"/>
+                </a:solidFill>
+                <a:latin typeface="Arial" panose="020B0604020202020204" pitchFamily="34" charset="0"/>
+              </a:rPr>
+              <a:t>Former fine meshes are relabeled Medium 2 because they sat very close to the medium meshes in total cell count; former extra-fine meshes are reported as Fine.</a:t>
+            </a:r>
+          </a:p>
+          <a:p>
+            <a:pPr marL="342900" indent="-342900">
+              <a:buFont typeface="+mj-lt"/>
+              <a:buChar char="•"/>
+            </a:pPr>
+            <a:r>
+              <a:rPr lang="en-US" sz="1500">
+                <a:solidFill>
+                  <a:srgbClr val="40464F"/>
+                </a:solidFill>
+                <a:latin typeface="Arial" panose="020B0604020202020204" pitchFamily="34" charset="0"/>
+              </a:rPr>
+              <a:t>The reported dC_D and dC_L values are the final Medium 2 to Fine changes, so this section is presented as mesh sensitivity rather than formal grid independence.</a:t>
+            </a:r>
+          </a:p>
+          <a:p>
+            <a:pPr marL="342900" indent="-342900">
+              <a:buFont typeface="+mj-lt"/>
+              <a:buChar char="•"/>
+            </a:pPr>
+            <a:r>
+              <a:rPr lang="en-US" sz="1500">
+                <a:solidFill>
+                  <a:srgbClr val="40464F"/>
+                </a:solidFill>
+                <a:latin typeface="Arial" panose="020B0604020202020204" pitchFamily="34" charset="0"/>
+              </a:rPr>
+              <a:t>Retained wall-layer cells remained zero, so the study captures coefficient sensitivity of the present setup rather than full boundary-layer independence.</a:t>
+            </a:r>
+          </a:p>
+        </p:txBody>
+      </p:sp>
+      <p:sp>
+        <p:nvSpPr>
+          <p:cNvPr id="65" name="Rectangle 64">
+            <a:extLst>
+              <a:ext uri="{FF2B5EF4-FFF2-40B4-BE49-F238E27FC236}">
+                <a16:creationId xmlns:a16="http://schemas.microsoft.com/office/drawing/2014/main" id="{0D7B80FF-80FF-F16C-7637-927B3481CF05}"/>
+              </a:ext>
+            </a:extLst>
+          </p:cNvPr>
+          <p:cNvSpPr/>
+          <p:nvPr/>
+        </p:nvSpPr>
+        <p:spPr>
+          <a:xfrm>
+            <a:off x="30454600" y="23393400"/>
+            <a:ext cx="12903200" cy="762000"/>
+          </a:xfrm>
+          <a:prstGeom prst="rect">
+            <a:avLst/>
+          </a:prstGeom>
+          <a:solidFill>
+            <a:srgbClr val="044684"/>
+          </a:solidFill>
+          <a:ln w="25400" cap="flat" cmpd="sng" algn="ctr">
+            <a:noFill/>
+            <a:prstDash val="solid"/>
+          </a:ln>
+          <a:effectLst/>
+          <a:extLst>
+            <a:ext uri="{91240B29-F687-4F45-9708-019B960494DF}">
+              <a14:hiddenLine xmlns:a14="http://schemas.microsoft.com/office/drawing/2010/main" w="25400" cap="flat" cmpd="sng" algn="ctr">
+                <a:solidFill>
+                  <a:schemeClr val="accent1">
+                    <a:shade val="15000"/>
+                  </a:schemeClr>
+                </a:solidFill>
+                <a:prstDash val="solid"/>
+              </a14:hiddenLine>
+            </a:ext>
+          </a:extLst>
+        </p:spPr>
+        <p:style>
+          <a:lnRef idx="2">
+            <a:schemeClr val="accent1">
+              <a:shade val="15000"/>
+            </a:schemeClr>
+          </a:lnRef>
+          <a:fillRef idx="1">
+            <a:schemeClr val="accent1"/>
+          </a:fillRef>
+          <a:effectRef idx="0">
+            <a:schemeClr val="accent1"/>
+          </a:effectRef>
+          <a:fontRef idx="minor">
+            <a:schemeClr val="lt1"/>
+          </a:fontRef>
+        </p:style>
+        <p:txBody>
+          <a:bodyPr lIns="127000" tIns="88900" rIns="50800" bIns="25400" rtlCol="0" anchor="ctr"/>
+          <a:lstStyle/>
+          <a:p>
+            <a:r>
+              <a:rPr lang="en-US" sz="2900" b="1">
+                <a:solidFill>
+                  <a:srgbClr val="FFFFFF"/>
+                </a:solidFill>
+                <a:latin typeface="Arial" panose="020B0604020202020204" pitchFamily="34" charset="0"/>
+              </a:rPr>
+              <a:t>Claim Boundary and Next Steps</a:t>
+            </a:r>
+          </a:p>
+        </p:txBody>
+      </p:sp>
+      <p:sp>
+        <p:nvSpPr>
+          <p:cNvPr id="66" name="TextBox 65">
+            <a:extLst>
+              <a:ext uri="{FF2B5EF4-FFF2-40B4-BE49-F238E27FC236}">
+                <a16:creationId xmlns:a16="http://schemas.microsoft.com/office/drawing/2014/main" id="{9D86448F-AF83-B1A6-BC4A-51367E2F81BB}"/>
+              </a:ext>
+            </a:extLst>
+          </p:cNvPr>
+          <p:cNvSpPr txBox="1"/>
+          <p:nvPr/>
+        </p:nvSpPr>
+        <p:spPr>
+          <a:xfrm>
+            <a:off x="30454600" y="24231600"/>
+            <a:ext cx="12903200" cy="1477328"/>
+          </a:xfrm>
+          <a:prstGeom prst="rect">
+            <a:avLst/>
+          </a:prstGeom>
+          <a:noFill/>
+        </p:spPr>
+        <p:txBody>
+          <a:bodyPr vert="horz" wrap="square" lIns="25400" tIns="0" rIns="25400" bIns="0" rtlCol="0">
+            <a:spAutoFit/>
+          </a:bodyPr>
+          <a:lstStyle/>
+          <a:p>
+            <a:pPr marL="342900" indent="-342900">
+              <a:buFont typeface="+mj-lt"/>
+              <a:buChar char="•"/>
+            </a:pPr>
+            <a:r>
+              <a:rPr lang="en-US" sz="1600">
+                <a:solidFill>
+                  <a:srgbClr val="40464F"/>
+                </a:solidFill>
+                <a:latin typeface="Arial" panose="020B0604020202020204" pitchFamily="34" charset="0"/>
+              </a:rPr>
+              <a:t>The main result is an integrated, traceable preliminary-design environment for flying-wing aircraft rather than a stand-alone new solver.</a:t>
+            </a:r>
+          </a:p>
+          <a:p>
+            <a:pPr marL="342900" indent="-342900">
+              <a:buFont typeface="+mj-lt"/>
+              <a:buChar char="•"/>
+            </a:pPr>
+            <a:r>
+              <a:rPr lang="en-US" sz="1600">
+                <a:solidFill>
+                  <a:srgbClr val="40464F"/>
+                </a:solidFill>
+                <a:latin typeface="Arial" panose="020B0604020202020204" pitchFamily="34" charset="0"/>
+              </a:rPr>
+              <a:t>The validation evidence supports a narrow claim: the present low-order workflow preserves lift and trim trends better than absolute drag for thick blended-centerbody configurations.</a:t>
+            </a:r>
+          </a:p>
+          <a:p>
+            <a:pPr marL="342900" indent="-342900">
+              <a:buFont typeface="+mj-lt"/>
+              <a:buChar char="•"/>
+            </a:pPr>
+            <a:r>
+              <a:rPr lang="en-US" sz="1600">
+                <a:solidFill>
+                  <a:srgbClr val="40464F"/>
+                </a:solidFill>
+                <a:latin typeface="Arial" panose="020B0604020202020204" pitchFamily="34" charset="0"/>
+              </a:rPr>
+              <a:t>The dominant missing term is centerbody-dominated pressure and interference drag rather than outer-wing skin friction alone.</a:t>
+            </a:r>
+          </a:p>
+          <a:p>
+            <a:pPr marL="342900" indent="-342900">
+              <a:buFont typeface="+mj-lt"/>
+              <a:buChar char="•"/>
+            </a:pPr>
+            <a:r>
+              <a:rPr lang="en-US" sz="1600">
+                <a:solidFill>
+                  <a:srgbClr val="40464F"/>
+                </a:solidFill>
+                <a:latin typeface="Arial" panose="020B0604020202020204" pitchFamily="34" charset="0"/>
+              </a:rPr>
+              <a:t>Next work should focus on stronger centerbody drag modeling, retained wall-layer verification, and comparison against additional published or experimental cases.</a:t>
+            </a:r>
+          </a:p>
+        </p:txBody>
+      </p:sp>
+      <p:sp>
+        <p:nvSpPr>
+          <p:cNvPr id="67" name="Rectangle 66">
+            <a:extLst>
+              <a:ext uri="{FF2B5EF4-FFF2-40B4-BE49-F238E27FC236}">
+                <a16:creationId xmlns:a16="http://schemas.microsoft.com/office/drawing/2014/main" id="{13402FC0-08E2-4FC7-F255-83B62DE9CCB5}"/>
+              </a:ext>
+            </a:extLst>
+          </p:cNvPr>
+          <p:cNvSpPr/>
+          <p:nvPr/>
+        </p:nvSpPr>
+        <p:spPr>
+          <a:xfrm>
+            <a:off x="30454600" y="26797000"/>
+            <a:ext cx="12903200" cy="762000"/>
+          </a:xfrm>
+          <a:prstGeom prst="rect">
+            <a:avLst/>
+          </a:prstGeom>
+          <a:solidFill>
+            <a:srgbClr val="044684"/>
+          </a:solidFill>
+          <a:ln w="25400" cap="flat" cmpd="sng" algn="ctr">
+            <a:noFill/>
+            <a:prstDash val="solid"/>
+          </a:ln>
+          <a:effectLst/>
+          <a:extLst>
+            <a:ext uri="{91240B29-F687-4F45-9708-019B960494DF}">
+              <a14:hiddenLine xmlns:a14="http://schemas.microsoft.com/office/drawing/2010/main" w="25400" cap="flat" cmpd="sng" algn="ctr">
+                <a:solidFill>
+                  <a:schemeClr val="accent1">
+                    <a:shade val="15000"/>
+                  </a:schemeClr>
+                </a:solidFill>
+                <a:prstDash val="solid"/>
+              </a14:hiddenLine>
+            </a:ext>
+          </a:extLst>
+        </p:spPr>
+        <p:style>
+          <a:lnRef idx="2">
+            <a:schemeClr val="accent1">
+              <a:shade val="15000"/>
+            </a:schemeClr>
+          </a:lnRef>
+          <a:fillRef idx="1">
+            <a:schemeClr val="accent1"/>
+          </a:fillRef>
+          <a:effectRef idx="0">
+            <a:schemeClr val="accent1"/>
+          </a:effectRef>
+          <a:fontRef idx="minor">
+            <a:schemeClr val="lt1"/>
+          </a:fontRef>
+        </p:style>
+        <p:txBody>
+          <a:bodyPr lIns="127000" tIns="88900" rIns="50800" bIns="25400" rtlCol="0" anchor="ctr"/>
+          <a:lstStyle/>
+          <a:p>
+            <a:r>
+              <a:rPr lang="en-US" sz="2900" b="1">
+                <a:solidFill>
+                  <a:srgbClr val="FFFFFF"/>
+                </a:solidFill>
+                <a:latin typeface="Arial" panose="020B0604020202020204" pitchFamily="34" charset="0"/>
+              </a:rPr>
+              <a:t>Selected References</a:t>
+            </a:r>
+          </a:p>
+        </p:txBody>
+      </p:sp>
+      <p:sp>
+        <p:nvSpPr>
+          <p:cNvPr id="68" name="TextBox 67">
+            <a:extLst>
+              <a:ext uri="{FF2B5EF4-FFF2-40B4-BE49-F238E27FC236}">
+                <a16:creationId xmlns:a16="http://schemas.microsoft.com/office/drawing/2014/main" id="{2D0FDBDD-B543-9E7B-00CC-3CCABED060F8}"/>
+              </a:ext>
+            </a:extLst>
+          </p:cNvPr>
+          <p:cNvSpPr txBox="1"/>
+          <p:nvPr/>
+        </p:nvSpPr>
+        <p:spPr>
+          <a:xfrm>
+            <a:off x="30454600" y="27635200"/>
+            <a:ext cx="12903200" cy="1200329"/>
+          </a:xfrm>
+          <a:prstGeom prst="rect">
+            <a:avLst/>
+          </a:prstGeom>
+          <a:noFill/>
+        </p:spPr>
+        <p:txBody>
+          <a:bodyPr vert="horz" wrap="square" lIns="25400" tIns="0" rIns="25400" bIns="0" rtlCol="0">
+            <a:spAutoFit/>
+          </a:bodyPr>
+          <a:lstStyle/>
+          <a:p>
+            <a:pPr marL="342900" indent="-342900">
+              <a:buFont typeface="+mj-lt"/>
+              <a:buChar char="•"/>
+            </a:pPr>
+            <a:r>
+              <a:rPr lang="en-US" sz="1300">
+                <a:solidFill>
+                  <a:srgbClr val="40464F"/>
+                </a:solidFill>
+                <a:latin typeface="Arial" panose="020B0604020202020204" pitchFamily="34" charset="0"/>
+              </a:rPr>
+              <a:t>Sharpe, P. D. (2021). AeroSandbox: A Differentiable Framework for Aircraft Design Optimization. Massachusetts Institute of Technology.</a:t>
+            </a:r>
+          </a:p>
+          <a:p>
+            <a:pPr marL="342900" indent="-342900">
+              <a:buFont typeface="+mj-lt"/>
+              <a:buChar char="•"/>
+            </a:pPr>
+            <a:r>
+              <a:rPr lang="en-US" sz="1300">
+                <a:solidFill>
+                  <a:srgbClr val="40464F"/>
+                </a:solidFill>
+                <a:latin typeface="Arial" panose="020B0604020202020204" pitchFamily="34" charset="0"/>
+              </a:rPr>
+              <a:t>Sharpe, P. D. (2024). Accelerating Practical Engineering Design Optimization with Computational Graph Transformations. Massachusetts Institute of Technology.</a:t>
+            </a:r>
+          </a:p>
+          <a:p>
+            <a:pPr marL="342900" indent="-342900">
+              <a:buFont typeface="+mj-lt"/>
+              <a:buChar char="•"/>
+            </a:pPr>
+            <a:r>
+              <a:rPr lang="en-US" sz="1300">
+                <a:solidFill>
+                  <a:srgbClr val="40464F"/>
+                </a:solidFill>
+                <a:latin typeface="Arial" panose="020B0604020202020204" pitchFamily="34" charset="0"/>
+              </a:rPr>
+              <a:t>Sharpe, P. D. (2025). NeuralFoil: A physics-informed machine learning model for airfoil aerodynamics. arXiv:2503.16323.</a:t>
+            </a:r>
+          </a:p>
+          <a:p>
+            <a:pPr marL="342900" indent="-342900">
+              <a:buFont typeface="+mj-lt"/>
+              <a:buChar char="•"/>
+            </a:pPr>
+            <a:r>
+              <a:rPr lang="en-US" sz="1300">
+                <a:solidFill>
+                  <a:srgbClr val="40464F"/>
+                </a:solidFill>
+                <a:latin typeface="Arial" panose="020B0604020202020204" pitchFamily="34" charset="0"/>
+              </a:rPr>
+              <a:t>Bowers, A. H., et al. (2023). Wake-Structure of the Prandtl-D. AIAA Applied Aerodynamics Conference.</a:t>
+            </a:r>
+          </a:p>
+          <a:p>
+            <a:pPr marL="342900" indent="-342900">
+              <a:buFont typeface="+mj-lt"/>
+              <a:buChar char="•"/>
+            </a:pPr>
+            <a:r>
+              <a:rPr lang="en-US" sz="1300">
+                <a:solidFill>
+                  <a:srgbClr val="40464F"/>
+                </a:solidFill>
+                <a:latin typeface="Arial" panose="020B0604020202020204" pitchFamily="34" charset="0"/>
+              </a:rPr>
+              <a:t>Yu, A., et al. (2022). Comparing Potential Flow Solvers for Aerodynamic Characteristics Estimation of the T-Flex UAV. ICAS 2022.</a:t>
+            </a:r>
+          </a:p>
+          <a:p>
+            <a:pPr marL="342900" indent="-342900">
+              <a:buFont typeface="+mj-lt"/>
+              <a:buChar char="•"/>
+            </a:pPr>
+            <a:r>
+              <a:rPr lang="en-US" sz="1300">
+                <a:solidFill>
+                  <a:srgbClr val="40464F"/>
+                </a:solidFill>
+                <a:latin typeface="Arial" panose="020B0604020202020204" pitchFamily="34" charset="0"/>
+              </a:rPr>
+              <a:t>Rosas-Cordova, A., et al. (2024). Validation of VSPAERO for Basic Wing Simulation. RIMNI.</a:t>
+            </a:r>
           </a:p>
         </p:txBody>
       </p:sp>
